--- a/jekyll-www.mock-server.com/images/MockServerScenarios.pptx
+++ b/jekyll-www.mock-server.com/images/MockServerScenarios.pptx
@@ -27,6 +27,14 @@
     <p:sldId id="274" r:id="rId18"/>
     <p:sldId id="275" r:id="rId19"/>
     <p:sldId id="276" r:id="rId20"/>
+    <p:sldId id="281" r:id="rId26"/>
+    <p:sldId id="282" r:id="rId27"/>
+    <p:sldId id="283" r:id="rId28"/>
+    <p:sldId id="284" r:id="rId29"/>
+    <p:sldId id="285" r:id="rId30"/>
+    <p:sldId id="286" r:id="rId31"/>
+    <p:sldId id="287" r:id="rId32"/>
+    <p:sldId id="288" r:id="rId33"/>
   </p:sldIdLst>
   <p:sldSz cx="21283613" cy="7099300"/>
   <p:notesSz cx="6858000" cy="9144000"/>
@@ -19672,6 +19680,4909 @@
 </p:sld>
 </file>
 
+<file path=ppt/slides/slide20.xml><?xml version="1.0" encoding="utf-8"?>
+<p:sld xmlns:a="http://schemas.openxmlformats.org/drawingml/2006/main" xmlns:p="http://schemas.openxmlformats.org/presentationml/2006/main" xmlns:r="http://schemas.openxmlformats.org/officeDocument/2006/relationships">
+  <p:cSld>
+    <p:spTree>
+      <p:nvGrpSpPr>
+        <p:cNvPr id="1" name=""/>
+        <p:cNvGrpSpPr/>
+        <p:nvPr/>
+      </p:nvGrpSpPr>
+      <p:grpSpPr/>
+      <p:cxnSp>
+        <p:nvCxnSpPr>
+          <p:cNvPr id="2" name="Straight Arrow Connector 1">
+            <a:extLst>
+              <a:ext uri="{FF2B5EF4-FFF2-40B4-BE49-F238E27FC236}">
+                <a16:creationId xmlns:a16="http://schemas.microsoft.com/office/drawing/2014/main" id="{D9AB7D2D-9ED5-D52F-9010-898D367F6D44}"/>
+              </a:ext>
+            </a:extLst>
+          </p:cNvPr>
+          <p:cNvCxnSpPr/>
+          <p:nvPr/>
+        </p:nvCxnSpPr>
+        <p:spPr>
+          <a:xfrm flipV="1">
+            <a:off x="6606727" y="3566175"/>
+            <a:ext cx="1983406" cy="4192"/>
+          </a:xfrm>
+          <a:prstGeom prst="straightConnector1">
+            <a:avLst/>
+          </a:prstGeom>
+          <a:ln>
+            <a:tailEnd type="arrow"/>
+          </a:ln>
+        </p:spPr>
+        <p:style>
+          <a:lnRef idx="2">
+            <a:schemeClr val="accent3"/>
+          </a:lnRef>
+          <a:fillRef idx="0">
+            <a:schemeClr val="accent3"/>
+          </a:fillRef>
+          <a:effectRef idx="1">
+            <a:schemeClr val="accent3"/>
+          </a:effectRef>
+          <a:fontRef idx="minor">
+            <a:schemeClr val="tx1"/>
+          </a:fontRef>
+        </p:style>
+      </p:cxnSp>
+      <p:sp>
+        <p:nvSpPr>
+          <p:cNvPr id="3" name="TextBox 2">
+            <a:extLst>
+              <a:ext uri="{FF2B5EF4-FFF2-40B4-BE49-F238E27FC236}">
+                <a16:creationId xmlns:a16="http://schemas.microsoft.com/office/drawing/2014/main" id="{A55B7FF9-6C50-E073-3E01-93F2D9E7E3A7}"/>
+              </a:ext>
+            </a:extLst>
+          </p:cNvPr>
+          <p:cNvSpPr txBox="1"/>
+          <p:nvPr/>
+        </p:nvSpPr>
+        <p:spPr>
+          <a:xfrm>
+            <a:off x="6521663" y="3291482"/>
+            <a:ext cx="2759008" cy="276999"/>
+          </a:xfrm>
+          <a:prstGeom prst="rect">
+            <a:avLst/>
+          </a:prstGeom>
+          <a:noFill/>
+        </p:spPr>
+        <p:txBody>
+          <a:bodyPr wrap="square" rtlCol="0">
+            <a:spAutoFit/>
+          </a:bodyPr>
+          <a:lstStyle/>
+          <a:p>
+            <a:r>
+              <a:rPr lang="en-US" sz="1200" dirty="0"/>
+              <a:t>3. Ramp Virtual Users</a:t>
+            </a:r>
+          </a:p>
+        </p:txBody>
+      </p:sp>
+      <p:sp>
+        <p:nvSpPr>
+          <p:cNvPr id="4" name="TextBox 3">
+            <a:extLst>
+              <a:ext uri="{FF2B5EF4-FFF2-40B4-BE49-F238E27FC236}">
+                <a16:creationId xmlns:a16="http://schemas.microsoft.com/office/drawing/2014/main" id="{EADD945A-D248-1C0F-D263-0B56A1265C5E}"/>
+              </a:ext>
+            </a:extLst>
+          </p:cNvPr>
+          <p:cNvSpPr txBox="1"/>
+          <p:nvPr/>
+        </p:nvSpPr>
+        <p:spPr>
+          <a:xfrm>
+            <a:off x="6521663" y="4121697"/>
+            <a:ext cx="1553402" cy="276999"/>
+          </a:xfrm>
+          <a:prstGeom prst="rect">
+            <a:avLst/>
+          </a:prstGeom>
+          <a:noFill/>
+        </p:spPr>
+        <p:txBody>
+          <a:bodyPr wrap="square" rtlCol="0">
+            <a:spAutoFit/>
+          </a:bodyPr>
+          <a:lstStyle/>
+          <a:p>
+            <a:r>
+              <a:rPr lang="en-US" sz="1200" dirty="0"/>
+              <a:t>5. Verify SLO</a:t>
+            </a:r>
+          </a:p>
+        </p:txBody>
+      </p:sp>
+      <p:cxnSp>
+        <p:nvCxnSpPr>
+          <p:cNvPr id="5" name="Straight Arrow Connector 87">
+            <a:extLst>
+              <a:ext uri="{FF2B5EF4-FFF2-40B4-BE49-F238E27FC236}">
+                <a16:creationId xmlns:a16="http://schemas.microsoft.com/office/drawing/2014/main" id="{6D5DF925-90DC-FAD8-676F-21EA686CD2B3}"/>
+              </a:ext>
+            </a:extLst>
+          </p:cNvPr>
+          <p:cNvCxnSpPr/>
+          <p:nvPr/>
+        </p:nvCxnSpPr>
+        <p:spPr>
+          <a:xfrm rot="5400000">
+            <a:off x="7662580" y="2914941"/>
+            <a:ext cx="422144" cy="2533849"/>
+          </a:xfrm>
+          <a:prstGeom prst="bentConnector2">
+            <a:avLst/>
+          </a:prstGeom>
+          <a:ln>
+            <a:tailEnd type="triangle"/>
+          </a:ln>
+        </p:spPr>
+        <p:style>
+          <a:lnRef idx="2">
+            <a:schemeClr val="accent3"/>
+          </a:lnRef>
+          <a:fillRef idx="0">
+            <a:schemeClr val="accent3"/>
+          </a:fillRef>
+          <a:effectRef idx="1">
+            <a:schemeClr val="accent3"/>
+          </a:effectRef>
+          <a:fontRef idx="minor">
+            <a:schemeClr val="tx1"/>
+          </a:fontRef>
+        </p:style>
+      </p:cxnSp>
+      <p:sp>
+        <p:nvSpPr>
+          <p:cNvPr id="6" name="Can 5">
+            <a:extLst>
+              <a:ext uri="{FF2B5EF4-FFF2-40B4-BE49-F238E27FC236}">
+                <a16:creationId xmlns:a16="http://schemas.microsoft.com/office/drawing/2014/main" id="{1C435CCD-27A8-E7B7-EC3D-E8AB4D1EFF8F}"/>
+              </a:ext>
+            </a:extLst>
+          </p:cNvPr>
+          <p:cNvSpPr/>
+          <p:nvPr/>
+        </p:nvSpPr>
+        <p:spPr>
+          <a:xfrm>
+            <a:off x="11173710" y="3122264"/>
+            <a:ext cx="988828" cy="868444"/>
+          </a:xfrm>
+          <a:prstGeom prst="can">
+            <a:avLst/>
+          </a:prstGeom>
+          <a:solidFill>
+            <a:schemeClr val="bg1"/>
+          </a:solidFill>
+          <a:ln w="19050" cmpd="sng">
+            <a:solidFill>
+              <a:schemeClr val="tx1"/>
+            </a:solidFill>
+          </a:ln>
+        </p:spPr>
+        <p:style>
+          <a:lnRef idx="1">
+            <a:schemeClr val="accent3"/>
+          </a:lnRef>
+          <a:fillRef idx="3">
+            <a:schemeClr val="accent3"/>
+          </a:fillRef>
+          <a:effectRef idx="2">
+            <a:schemeClr val="accent3"/>
+          </a:effectRef>
+          <a:fontRef idx="minor">
+            <a:schemeClr val="lt1"/>
+          </a:fontRef>
+        </p:style>
+        <p:txBody>
+          <a:bodyPr lIns="91436" tIns="45718" rIns="91436" bIns="45718" rtlCol="0" anchor="ctr" anchorCtr="0"/>
+          <a:lstStyle/>
+          <a:p>
+            <a:pPr algn="ctr"/>
+            <a:r>
+              <a:rPr lang="en-US" sz="900" dirty="0">
+                <a:solidFill>
+                  <a:schemeClr val="tx1"/>
+                </a:solidFill>
+                <a:latin typeface="Helvetica"/>
+                <a:cs typeface="Helvetica"/>
+              </a:rPr>
+              <a:t>SLO</a:t>
+            </a:r>
+          </a:p>
+          <a:p>
+            <a:pPr algn="ctr"/>
+            <a:r>
+              <a:rPr lang="en-US" sz="900" dirty="0">
+                <a:solidFill>
+                  <a:schemeClr val="tx1"/>
+                </a:solidFill>
+                <a:latin typeface="Helvetica"/>
+                <a:cs typeface="Helvetica"/>
+              </a:rPr>
+              <a:t>Samples</a:t>
+            </a:r>
+          </a:p>
+        </p:txBody>
+      </p:sp>
+      <p:sp>
+        <p:nvSpPr>
+          <p:cNvPr id="7" name="Rectangle 6">
+            <a:extLst>
+              <a:ext uri="{FF2B5EF4-FFF2-40B4-BE49-F238E27FC236}">
+                <a16:creationId xmlns:a16="http://schemas.microsoft.com/office/drawing/2014/main" id="{1D36CD14-8062-827A-4BB3-C8EFB46C6FCA}"/>
+              </a:ext>
+            </a:extLst>
+          </p:cNvPr>
+          <p:cNvSpPr/>
+          <p:nvPr/>
+        </p:nvSpPr>
+        <p:spPr>
+          <a:xfrm>
+            <a:off x="8664564" y="3242893"/>
+            <a:ext cx="940561" cy="664100"/>
+          </a:xfrm>
+          <a:prstGeom prst="rect">
+            <a:avLst/>
+          </a:prstGeom>
+          <a:solidFill>
+            <a:schemeClr val="bg1"/>
+          </a:solidFill>
+          <a:ln w="19050" cmpd="sng">
+            <a:solidFill>
+              <a:schemeClr val="tx1"/>
+            </a:solidFill>
+          </a:ln>
+        </p:spPr>
+        <p:style>
+          <a:lnRef idx="1">
+            <a:schemeClr val="accent3"/>
+          </a:lnRef>
+          <a:fillRef idx="3">
+            <a:schemeClr val="accent3"/>
+          </a:fillRef>
+          <a:effectRef idx="2">
+            <a:schemeClr val="accent3"/>
+          </a:effectRef>
+          <a:fontRef idx="minor">
+            <a:schemeClr val="lt1"/>
+          </a:fontRef>
+        </p:style>
+        <p:txBody>
+          <a:bodyPr lIns="91436" tIns="45718" rIns="91436" bIns="45718" rtlCol="0" anchor="ctr" anchorCtr="0"/>
+          <a:lstStyle/>
+          <a:p>
+            <a:pPr algn="ctr"/>
+            <a:r>
+              <a:rPr lang="en-US" sz="900" dirty="0">
+                <a:solidFill>
+                  <a:schemeClr val="tx1"/>
+                </a:solidFill>
+                <a:latin typeface="Helvetica"/>
+                <a:cs typeface="Helvetica"/>
+              </a:rPr>
+              <a:t>Virtual</a:t>
+            </a:r>
+          </a:p>
+          <a:p>
+            <a:pPr algn="ctr"/>
+            <a:r>
+              <a:rPr lang="en-US" sz="900" dirty="0">
+                <a:solidFill>
+                  <a:schemeClr val="tx1"/>
+                </a:solidFill>
+                <a:latin typeface="Helvetica"/>
+                <a:cs typeface="Helvetica"/>
+              </a:rPr>
+              <a:t>Users</a:t>
+            </a:r>
+          </a:p>
+        </p:txBody>
+      </p:sp>
+      <p:cxnSp>
+        <p:nvCxnSpPr>
+          <p:cNvPr id="8" name="Straight Arrow Connector 7">
+            <a:extLst>
+              <a:ext uri="{FF2B5EF4-FFF2-40B4-BE49-F238E27FC236}">
+                <a16:creationId xmlns:a16="http://schemas.microsoft.com/office/drawing/2014/main" id="{9B5AE56B-C423-FE00-5AF5-80FC47B66101}"/>
+              </a:ext>
+            </a:extLst>
+          </p:cNvPr>
+          <p:cNvCxnSpPr/>
+          <p:nvPr/>
+        </p:nvCxnSpPr>
+        <p:spPr>
+          <a:xfrm>
+            <a:off x="9714192" y="3567122"/>
+            <a:ext cx="1355774" cy="7823"/>
+          </a:xfrm>
+          <a:prstGeom prst="straightConnector1">
+            <a:avLst/>
+          </a:prstGeom>
+          <a:ln>
+            <a:headEnd type="triangle"/>
+            <a:tailEnd type="triangle"/>
+          </a:ln>
+        </p:spPr>
+        <p:style>
+          <a:lnRef idx="2">
+            <a:schemeClr val="accent3"/>
+          </a:lnRef>
+          <a:fillRef idx="0">
+            <a:schemeClr val="accent3"/>
+          </a:fillRef>
+          <a:effectRef idx="1">
+            <a:schemeClr val="accent3"/>
+          </a:effectRef>
+          <a:fontRef idx="minor">
+            <a:schemeClr val="tx1"/>
+          </a:fontRef>
+        </p:style>
+      </p:cxnSp>
+      <p:sp>
+        <p:nvSpPr>
+          <p:cNvPr id="9" name="TextBox 8">
+            <a:extLst>
+              <a:ext uri="{FF2B5EF4-FFF2-40B4-BE49-F238E27FC236}">
+                <a16:creationId xmlns:a16="http://schemas.microsoft.com/office/drawing/2014/main" id="{CF3DA4D8-1D0B-E54B-317A-1F0E920B7F65}"/>
+              </a:ext>
+            </a:extLst>
+          </p:cNvPr>
+          <p:cNvSpPr txBox="1"/>
+          <p:nvPr/>
+        </p:nvSpPr>
+        <p:spPr>
+          <a:xfrm>
+            <a:off x="9639761" y="3274794"/>
+            <a:ext cx="1553402" cy="276999"/>
+          </a:xfrm>
+          <a:prstGeom prst="rect">
+            <a:avLst/>
+          </a:prstGeom>
+          <a:noFill/>
+        </p:spPr>
+        <p:txBody>
+          <a:bodyPr wrap="square" rtlCol="0">
+            <a:spAutoFit/>
+          </a:bodyPr>
+          <a:lstStyle/>
+          <a:p>
+            <a:r>
+              <a:rPr lang="en-US" sz="1200" dirty="0"/>
+              <a:t>4. Record Metrics</a:t>
+            </a:r>
+          </a:p>
+        </p:txBody>
+      </p:sp>
+      <p:sp>
+        <p:nvSpPr>
+          <p:cNvPr id="10" name="Rounded Rectangle 9">
+            <a:extLst>
+              <a:ext uri="{FF2B5EF4-FFF2-40B4-BE49-F238E27FC236}">
+                <a16:creationId xmlns:a16="http://schemas.microsoft.com/office/drawing/2014/main" id="{CAAA5194-CA2E-404E-18BC-C7031581D00D}"/>
+              </a:ext>
+            </a:extLst>
+          </p:cNvPr>
+          <p:cNvSpPr/>
+          <p:nvPr/>
+        </p:nvSpPr>
+        <p:spPr>
+          <a:xfrm>
+            <a:off x="8457229" y="1823774"/>
+            <a:ext cx="1355231" cy="1012102"/>
+          </a:xfrm>
+          <a:prstGeom prst="roundRect">
+            <a:avLst/>
+          </a:prstGeom>
+          <a:solidFill>
+            <a:schemeClr val="bg1"/>
+          </a:solidFill>
+          <a:ln w="19050" cmpd="sng">
+            <a:solidFill>
+              <a:schemeClr val="tx1"/>
+            </a:solidFill>
+            <a:prstDash val="dash"/>
+          </a:ln>
+        </p:spPr>
+        <p:style>
+          <a:lnRef idx="1">
+            <a:schemeClr val="accent3"/>
+          </a:lnRef>
+          <a:fillRef idx="3">
+            <a:schemeClr val="accent3"/>
+          </a:fillRef>
+          <a:effectRef idx="2">
+            <a:schemeClr val="accent3"/>
+          </a:effectRef>
+          <a:fontRef idx="minor">
+            <a:schemeClr val="lt1"/>
+          </a:fontRef>
+        </p:style>
+        <p:txBody>
+          <a:bodyPr rtlCol="0" anchor="ctr" anchorCtr="0"/>
+          <a:lstStyle/>
+          <a:p>
+            <a:pPr algn="ctr"/>
+            <a:r>
+              <a:rPr lang="en-US" sz="1200" dirty="0">
+                <a:solidFill>
+                  <a:schemeClr val="tx1"/>
+                </a:solidFill>
+                <a:latin typeface="Helvetica"/>
+                <a:cs typeface="Helvetica"/>
+              </a:rPr>
+              <a:t>Load</a:t>
+            </a:r>
+          </a:p>
+          <a:p>
+            <a:pPr algn="ctr"/>
+            <a:r>
+              <a:rPr lang="en-US" sz="1200" dirty="0">
+                <a:solidFill>
+                  <a:schemeClr val="tx1"/>
+                </a:solidFill>
+                <a:latin typeface="Helvetica"/>
+                <a:cs typeface="Helvetica"/>
+              </a:rPr>
+              <a:t>Scenario</a:t>
+            </a:r>
+          </a:p>
+        </p:txBody>
+      </p:sp>
+      <p:cxnSp>
+        <p:nvCxnSpPr>
+          <p:cNvPr id="11" name="Straight Arrow Connector 10">
+            <a:extLst>
+              <a:ext uri="{FF2B5EF4-FFF2-40B4-BE49-F238E27FC236}">
+                <a16:creationId xmlns:a16="http://schemas.microsoft.com/office/drawing/2014/main" id="{38B4D2AE-A5EA-6177-A69A-3281E191637B}"/>
+              </a:ext>
+            </a:extLst>
+          </p:cNvPr>
+          <p:cNvCxnSpPr/>
+          <p:nvPr/>
+        </p:nvCxnSpPr>
+        <p:spPr>
+          <a:xfrm flipV="1">
+            <a:off x="6606729" y="2326837"/>
+            <a:ext cx="1764891" cy="1888"/>
+          </a:xfrm>
+          <a:prstGeom prst="straightConnector1">
+            <a:avLst/>
+          </a:prstGeom>
+          <a:ln>
+            <a:solidFill>
+              <a:schemeClr val="accent3"/>
+            </a:solidFill>
+            <a:tailEnd type="arrow"/>
+          </a:ln>
+        </p:spPr>
+        <p:style>
+          <a:lnRef idx="2">
+            <a:schemeClr val="accent3"/>
+          </a:lnRef>
+          <a:fillRef idx="0">
+            <a:schemeClr val="accent3"/>
+          </a:fillRef>
+          <a:effectRef idx="1">
+            <a:schemeClr val="accent3"/>
+          </a:effectRef>
+          <a:fontRef idx="minor">
+            <a:schemeClr val="tx1"/>
+          </a:fontRef>
+        </p:style>
+      </p:cxnSp>
+      <p:sp>
+        <p:nvSpPr>
+          <p:cNvPr id="12" name="TextBox 11">
+            <a:extLst>
+              <a:ext uri="{FF2B5EF4-FFF2-40B4-BE49-F238E27FC236}">
+                <a16:creationId xmlns:a16="http://schemas.microsoft.com/office/drawing/2014/main" id="{F31C76BD-4D63-2959-0862-198D4ACA5357}"/>
+              </a:ext>
+            </a:extLst>
+          </p:cNvPr>
+          <p:cNvSpPr txBox="1"/>
+          <p:nvPr/>
+        </p:nvSpPr>
+        <p:spPr>
+          <a:xfrm>
+            <a:off x="6521665" y="2049840"/>
+            <a:ext cx="1715807" cy="276999"/>
+          </a:xfrm>
+          <a:prstGeom prst="rect">
+            <a:avLst/>
+          </a:prstGeom>
+          <a:noFill/>
+        </p:spPr>
+        <p:txBody>
+          <a:bodyPr wrap="square" rtlCol="0">
+            <a:spAutoFit/>
+          </a:bodyPr>
+          <a:lstStyle/>
+          <a:p>
+            <a:r>
+              <a:rPr lang="en-US" sz="1200" dirty="0"/>
+              <a:t>1. Trigger Run</a:t>
+            </a:r>
+          </a:p>
+        </p:txBody>
+      </p:sp>
+      <p:cxnSp>
+        <p:nvCxnSpPr>
+          <p:cNvPr id="13" name="Elbow Connector 12">
+            <a:extLst>
+              <a:ext uri="{FF2B5EF4-FFF2-40B4-BE49-F238E27FC236}">
+                <a16:creationId xmlns:a16="http://schemas.microsoft.com/office/drawing/2014/main" id="{960844B1-1B6B-D08F-E203-FF7EAE723CA1}"/>
+              </a:ext>
+            </a:extLst>
+          </p:cNvPr>
+          <p:cNvCxnSpPr/>
+          <p:nvPr/>
+        </p:nvCxnSpPr>
+        <p:spPr>
+          <a:xfrm>
+            <a:off x="9876256" y="2329825"/>
+            <a:ext cx="1783814" cy="741880"/>
+          </a:xfrm>
+          <a:prstGeom prst="bentConnector2">
+            <a:avLst/>
+          </a:prstGeom>
+          <a:ln>
+            <a:solidFill>
+              <a:schemeClr val="accent3"/>
+            </a:solidFill>
+            <a:tailEnd type="triangle"/>
+          </a:ln>
+        </p:spPr>
+        <p:style>
+          <a:lnRef idx="2">
+            <a:schemeClr val="accent3"/>
+          </a:lnRef>
+          <a:fillRef idx="0">
+            <a:schemeClr val="accent3"/>
+          </a:fillRef>
+          <a:effectRef idx="1">
+            <a:schemeClr val="accent3"/>
+          </a:effectRef>
+          <a:fontRef idx="minor">
+            <a:schemeClr val="tx1"/>
+          </a:fontRef>
+        </p:style>
+      </p:cxnSp>
+      <p:sp>
+        <p:nvSpPr>
+          <p:cNvPr id="14" name="TextBox 13">
+            <a:extLst>
+              <a:ext uri="{FF2B5EF4-FFF2-40B4-BE49-F238E27FC236}">
+                <a16:creationId xmlns:a16="http://schemas.microsoft.com/office/drawing/2014/main" id="{1B113FE2-4257-9E4A-F3CC-7776CAA9CCB4}"/>
+              </a:ext>
+            </a:extLst>
+          </p:cNvPr>
+          <p:cNvSpPr txBox="1"/>
+          <p:nvPr/>
+        </p:nvSpPr>
+        <p:spPr>
+          <a:xfrm>
+            <a:off x="9812460" y="2060473"/>
+            <a:ext cx="1715807" cy="276999"/>
+          </a:xfrm>
+          <a:prstGeom prst="rect">
+            <a:avLst/>
+          </a:prstGeom>
+          <a:noFill/>
+        </p:spPr>
+        <p:txBody>
+          <a:bodyPr wrap="square" rtlCol="0">
+            <a:spAutoFit/>
+          </a:bodyPr>
+          <a:lstStyle/>
+          <a:p>
+            <a:r>
+              <a:rPr lang="en-US" sz="1200" dirty="0"/>
+              <a:t>2. Send to Target</a:t>
+            </a:r>
+          </a:p>
+        </p:txBody>
+      </p:sp>
+    </p:spTree>
+  </p:cSld>
+  <p:clrMapOvr>
+    <a:masterClrMapping/>
+  </p:clrMapOvr>
+</p:sld>
+</file>
+
+<file path=ppt/slides/slide21.xml><?xml version="1.0" encoding="utf-8"?>
+<p:sld xmlns:a="http://schemas.openxmlformats.org/drawingml/2006/main" xmlns:p="http://schemas.openxmlformats.org/presentationml/2006/main" xmlns:r="http://schemas.openxmlformats.org/officeDocument/2006/relationships">
+  <p:cSld>
+    <p:spTree>
+      <p:nvGrpSpPr>
+        <p:cNvPr id="1" name=""/>
+        <p:cNvGrpSpPr/>
+        <p:nvPr/>
+      </p:nvGrpSpPr>
+      <p:grpSpPr/>
+      <p:cxnSp>
+        <p:nvCxnSpPr>
+          <p:cNvPr id="17" name="Straight Arrow Connector 16"/>
+          <p:cNvCxnSpPr/>
+          <p:nvPr/>
+        </p:nvCxnSpPr>
+        <p:spPr>
+          <a:xfrm flipV="1">
+            <a:off x="6606727" y="3566175"/>
+            <a:ext cx="1983406" cy="4192"/>
+          </a:xfrm>
+          <a:prstGeom prst="straightConnector1">
+            <a:avLst/>
+          </a:prstGeom>
+          <a:ln>
+            <a:tailEnd type="arrow"/>
+          </a:ln>
+        </p:spPr>
+        <p:style>
+          <a:lnRef idx="2">
+            <a:schemeClr val="accent1"/>
+          </a:lnRef>
+          <a:fillRef idx="0">
+            <a:schemeClr val="accent1"/>
+          </a:fillRef>
+          <a:effectRef idx="1">
+            <a:schemeClr val="accent1"/>
+          </a:effectRef>
+          <a:fontRef idx="minor">
+            <a:schemeClr val="tx1"/>
+          </a:fontRef>
+        </p:style>
+      </p:cxnSp>
+      <p:sp>
+        <p:nvSpPr>
+          <p:cNvPr id="18" name="TextBox 17"/>
+          <p:cNvSpPr txBox="1"/>
+          <p:nvPr/>
+        </p:nvSpPr>
+        <p:spPr>
+          <a:xfrm>
+            <a:off x="6521663" y="3291482"/>
+            <a:ext cx="2759008" cy="276999"/>
+          </a:xfrm>
+          <a:prstGeom prst="rect">
+            <a:avLst/>
+          </a:prstGeom>
+          <a:noFill/>
+        </p:spPr>
+        <p:txBody>
+          <a:bodyPr wrap="square" rtlCol="0">
+            <a:spAutoFit/>
+          </a:bodyPr>
+          <a:lstStyle/>
+          <a:p>
+            <a:r>
+              <a:rPr lang="en-US" sz="1200" dirty="0"/>
+              <a:t>3. Open Dashboard</a:t>
+            </a:r>
+          </a:p>
+        </p:txBody>
+      </p:sp>
+      <p:sp>
+        <p:nvSpPr>
+          <p:cNvPr id="67" name="TextBox 66"/>
+          <p:cNvSpPr txBox="1"/>
+          <p:nvPr/>
+        </p:nvSpPr>
+        <p:spPr>
+          <a:xfrm>
+            <a:off x="6521663" y="4121697"/>
+            <a:ext cx="1553402" cy="276999"/>
+          </a:xfrm>
+          <a:prstGeom prst="rect">
+            <a:avLst/>
+          </a:prstGeom>
+          <a:noFill/>
+        </p:spPr>
+        <p:txBody>
+          <a:bodyPr wrap="square" rtlCol="0">
+            <a:spAutoFit/>
+          </a:bodyPr>
+          <a:lstStyle/>
+          <a:p>
+            <a:r>
+              <a:rPr lang="en-US" sz="1200" dirty="0"/>
+              <a:t>5. View / Export</a:t>
+            </a:r>
+          </a:p>
+        </p:txBody>
+      </p:sp>
+      <p:cxnSp>
+        <p:nvCxnSpPr>
+          <p:cNvPr id="88" name="Straight Arrow Connector 87"/>
+          <p:cNvCxnSpPr/>
+          <p:nvPr/>
+        </p:nvCxnSpPr>
+        <p:spPr>
+          <a:xfrm rot="5400000">
+            <a:off x="7662580" y="2914941"/>
+            <a:ext cx="422144" cy="2533849"/>
+          </a:xfrm>
+          <a:prstGeom prst="bentConnector2">
+            <a:avLst/>
+          </a:prstGeom>
+          <a:ln>
+            <a:tailEnd type="triangle"/>
+          </a:ln>
+        </p:spPr>
+        <p:style>
+          <a:lnRef idx="2">
+            <a:schemeClr val="accent1"/>
+          </a:lnRef>
+          <a:fillRef idx="0">
+            <a:schemeClr val="accent1"/>
+          </a:fillRef>
+          <a:effectRef idx="1">
+            <a:schemeClr val="accent1"/>
+          </a:effectRef>
+          <a:fontRef idx="minor">
+            <a:schemeClr val="tx1"/>
+          </a:fontRef>
+        </p:style>
+      </p:cxnSp>
+      <p:sp>
+        <p:nvSpPr>
+          <p:cNvPr id="2" name="Can 1"/>
+          <p:cNvSpPr/>
+          <p:nvPr/>
+        </p:nvSpPr>
+        <p:spPr>
+          <a:xfrm>
+            <a:off x="11173710" y="3122264"/>
+            <a:ext cx="988828" cy="868444"/>
+          </a:xfrm>
+          <a:prstGeom prst="can">
+            <a:avLst/>
+          </a:prstGeom>
+          <a:solidFill>
+            <a:schemeClr val="bg1"/>
+          </a:solidFill>
+          <a:ln w="19050" cmpd="sng">
+            <a:solidFill>
+              <a:schemeClr val="tx1"/>
+            </a:solidFill>
+          </a:ln>
+        </p:spPr>
+        <p:style>
+          <a:lnRef idx="1">
+            <a:schemeClr val="accent1"/>
+          </a:lnRef>
+          <a:fillRef idx="3">
+            <a:schemeClr val="accent1"/>
+          </a:fillRef>
+          <a:effectRef idx="2">
+            <a:schemeClr val="accent1"/>
+          </a:effectRef>
+          <a:fontRef idx="minor">
+            <a:schemeClr val="lt1"/>
+          </a:fontRef>
+        </p:style>
+        <p:txBody>
+          <a:bodyPr lIns="91436" tIns="45718" rIns="91436" bIns="45718" rtlCol="0" anchor="ctr" anchorCtr="0"/>
+          <a:lstStyle/>
+          <a:p>
+            <a:pPr algn="ctr"/>
+            <a:r>
+              <a:rPr lang="en-US" sz="900" dirty="0">
+                <a:solidFill>
+                  <a:schemeClr val="tx1"/>
+                </a:solidFill>
+                <a:latin typeface="Helvetica"/>
+                <a:cs typeface="Helvetica"/>
+              </a:rPr>
+              <a:t>Captured</a:t>
+            </a:r>
+          </a:p>
+          <a:p>
+            <a:pPr algn="ctr"/>
+            <a:r>
+              <a:rPr lang="en-US" sz="900" dirty="0">
+                <a:solidFill>
+                  <a:schemeClr val="tx1"/>
+                </a:solidFill>
+                <a:latin typeface="Helvetica"/>
+                <a:cs typeface="Helvetica"/>
+              </a:rPr>
+              <a:t>Traffic</a:t>
+            </a:r>
+          </a:p>
+        </p:txBody>
+      </p:sp>
+      <p:sp>
+        <p:nvSpPr>
+          <p:cNvPr id="21" name="Rectangle 20"/>
+          <p:cNvSpPr/>
+          <p:nvPr/>
+        </p:nvSpPr>
+        <p:spPr>
+          <a:xfrm>
+            <a:off x="8664564" y="3242893"/>
+            <a:ext cx="940561" cy="664100"/>
+          </a:xfrm>
+          <a:prstGeom prst="rect">
+            <a:avLst/>
+          </a:prstGeom>
+          <a:solidFill>
+            <a:schemeClr val="bg1"/>
+          </a:solidFill>
+          <a:ln w="19050" cmpd="sng">
+            <a:solidFill>
+              <a:schemeClr val="tx1"/>
+            </a:solidFill>
+          </a:ln>
+        </p:spPr>
+        <p:style>
+          <a:lnRef idx="1">
+            <a:schemeClr val="accent1"/>
+          </a:lnRef>
+          <a:fillRef idx="3">
+            <a:schemeClr val="accent1"/>
+          </a:fillRef>
+          <a:effectRef idx="2">
+            <a:schemeClr val="accent1"/>
+          </a:effectRef>
+          <a:fontRef idx="minor">
+            <a:schemeClr val="lt1"/>
+          </a:fontRef>
+        </p:style>
+        <p:txBody>
+          <a:bodyPr lIns="91436" tIns="45718" rIns="91436" bIns="45718" rtlCol="0" anchor="ctr" anchorCtr="0"/>
+          <a:lstStyle/>
+          <a:p>
+            <a:pPr algn="ctr"/>
+            <a:r>
+              <a:rPr lang="en-US" sz="900" dirty="0">
+                <a:solidFill>
+                  <a:schemeClr val="tx1"/>
+                </a:solidFill>
+                <a:latin typeface="Helvetica"/>
+                <a:cs typeface="Helvetica"/>
+              </a:rPr>
+              <a:t>Dashboard</a:t>
+            </a:r>
+          </a:p>
+          <a:p>
+            <a:pPr algn="ctr"/>
+            <a:r>
+              <a:rPr lang="en-US" sz="900" dirty="0">
+                <a:solidFill>
+                  <a:schemeClr val="tx1"/>
+                </a:solidFill>
+                <a:latin typeface="Helvetica"/>
+                <a:cs typeface="Helvetica"/>
+              </a:rPr>
+              <a:t>&amp; Retrieve</a:t>
+            </a:r>
+          </a:p>
+        </p:txBody>
+      </p:sp>
+      <p:cxnSp>
+        <p:nvCxnSpPr>
+          <p:cNvPr id="7" name="Straight Arrow Connector 6"/>
+          <p:cNvCxnSpPr/>
+          <p:nvPr/>
+        </p:nvCxnSpPr>
+        <p:spPr>
+          <a:xfrm>
+            <a:off x="9714192" y="3567122"/>
+            <a:ext cx="1355774" cy="7823"/>
+          </a:xfrm>
+          <a:prstGeom prst="straightConnector1">
+            <a:avLst/>
+          </a:prstGeom>
+          <a:ln>
+            <a:headEnd type="triangle"/>
+            <a:tailEnd type="triangle"/>
+          </a:ln>
+        </p:spPr>
+        <p:style>
+          <a:lnRef idx="2">
+            <a:schemeClr val="accent1"/>
+          </a:lnRef>
+          <a:fillRef idx="0">
+            <a:schemeClr val="accent1"/>
+          </a:fillRef>
+          <a:effectRef idx="1">
+            <a:schemeClr val="accent1"/>
+          </a:effectRef>
+          <a:fontRef idx="minor">
+            <a:schemeClr val="tx1"/>
+          </a:fontRef>
+        </p:style>
+      </p:cxnSp>
+      <p:sp>
+        <p:nvSpPr>
+          <p:cNvPr id="28" name="TextBox 27"/>
+          <p:cNvSpPr txBox="1"/>
+          <p:nvPr/>
+        </p:nvSpPr>
+        <p:spPr>
+          <a:xfrm>
+            <a:off x="9639761" y="3274794"/>
+            <a:ext cx="1553402" cy="276999"/>
+          </a:xfrm>
+          <a:prstGeom prst="rect">
+            <a:avLst/>
+          </a:prstGeom>
+          <a:noFill/>
+        </p:spPr>
+        <p:txBody>
+          <a:bodyPr wrap="square" rtlCol="0">
+            <a:spAutoFit/>
+          </a:bodyPr>
+          <a:lstStyle/>
+          <a:p>
+            <a:r>
+              <a:rPr lang="en-US" sz="1200" dirty="0"/>
+              <a:t>4. Inspect Traffic</a:t>
+            </a:r>
+          </a:p>
+        </p:txBody>
+      </p:sp>
+      <p:sp>
+        <p:nvSpPr>
+          <p:cNvPr id="31" name="Rounded Rectangle 30"/>
+          <p:cNvSpPr/>
+          <p:nvPr/>
+        </p:nvSpPr>
+        <p:spPr>
+          <a:xfrm>
+            <a:off x="8457229" y="1823774"/>
+            <a:ext cx="1355231" cy="1012102"/>
+          </a:xfrm>
+          <a:prstGeom prst="roundRect">
+            <a:avLst/>
+          </a:prstGeom>
+          <a:solidFill>
+            <a:schemeClr val="bg1"/>
+          </a:solidFill>
+          <a:ln w="19050" cmpd="sng">
+            <a:solidFill>
+              <a:schemeClr val="tx1">
+                <a:lumMod val="50000"/>
+                <a:lumOff val="50000"/>
+                <a:alpha val="70000"/>
+              </a:schemeClr>
+            </a:solidFill>
+            <a:prstDash val="dash"/>
+          </a:ln>
+        </p:spPr>
+        <p:style>
+          <a:lnRef idx="1">
+            <a:schemeClr val="accent1"/>
+          </a:lnRef>
+          <a:fillRef idx="3">
+            <a:schemeClr val="accent1"/>
+          </a:fillRef>
+          <a:effectRef idx="2">
+            <a:schemeClr val="accent1"/>
+          </a:effectRef>
+          <a:fontRef idx="minor">
+            <a:schemeClr val="lt1"/>
+          </a:fontRef>
+        </p:style>
+        <p:txBody>
+          <a:bodyPr rtlCol="0" anchor="ctr" anchorCtr="0"/>
+          <a:lstStyle/>
+          <a:p>
+            <a:pPr algn="ctr"/>
+            <a:r>
+              <a:rPr lang="en-US" sz="1200" dirty="0">
+                <a:solidFill>
+                  <a:schemeClr val="bg1">
+                    <a:lumMod val="50000"/>
+                  </a:schemeClr>
+                </a:solidFill>
+                <a:latin typeface="Helvetica"/>
+                <a:cs typeface="Helvetica"/>
+              </a:rPr>
+              <a:t>Proxy</a:t>
+            </a:r>
+          </a:p>
+        </p:txBody>
+      </p:sp>
+      <p:cxnSp>
+        <p:nvCxnSpPr>
+          <p:cNvPr id="32" name="Straight Arrow Connector 31"/>
+          <p:cNvCxnSpPr/>
+          <p:nvPr/>
+        </p:nvCxnSpPr>
+        <p:spPr>
+          <a:xfrm flipV="1">
+            <a:off x="6606729" y="2326837"/>
+            <a:ext cx="1764891" cy="1888"/>
+          </a:xfrm>
+          <a:prstGeom prst="straightConnector1">
+            <a:avLst/>
+          </a:prstGeom>
+          <a:ln>
+            <a:solidFill>
+              <a:schemeClr val="accent1">
+                <a:alpha val="70000"/>
+              </a:schemeClr>
+            </a:solidFill>
+            <a:tailEnd type="arrow"/>
+          </a:ln>
+        </p:spPr>
+        <p:style>
+          <a:lnRef idx="2">
+            <a:schemeClr val="accent1"/>
+          </a:lnRef>
+          <a:fillRef idx="0">
+            <a:schemeClr val="accent1"/>
+          </a:fillRef>
+          <a:effectRef idx="1">
+            <a:schemeClr val="accent1"/>
+          </a:effectRef>
+          <a:fontRef idx="minor">
+            <a:schemeClr val="tx1"/>
+          </a:fontRef>
+        </p:style>
+      </p:cxnSp>
+      <p:sp>
+        <p:nvSpPr>
+          <p:cNvPr id="33" name="TextBox 32"/>
+          <p:cNvSpPr txBox="1"/>
+          <p:nvPr/>
+        </p:nvSpPr>
+        <p:spPr>
+          <a:xfrm>
+            <a:off x="6521665" y="2049840"/>
+            <a:ext cx="1715807" cy="276999"/>
+          </a:xfrm>
+          <a:prstGeom prst="rect">
+            <a:avLst/>
+          </a:prstGeom>
+          <a:noFill/>
+        </p:spPr>
+        <p:txBody>
+          <a:bodyPr wrap="square" rtlCol="0">
+            <a:spAutoFit/>
+          </a:bodyPr>
+          <a:lstStyle/>
+          <a:p>
+            <a:r>
+              <a:rPr lang="en-US" sz="1200" dirty="0">
+                <a:solidFill>
+                  <a:schemeClr val="bg1">
+                    <a:lumMod val="50000"/>
+                  </a:schemeClr>
+                </a:solidFill>
+              </a:rPr>
+              <a:t>1. Proxy AI Call</a:t>
+            </a:r>
+          </a:p>
+        </p:txBody>
+      </p:sp>
+      <p:cxnSp>
+        <p:nvCxnSpPr>
+          <p:cNvPr id="22" name="Elbow Connector 21"/>
+          <p:cNvCxnSpPr/>
+          <p:nvPr/>
+        </p:nvCxnSpPr>
+        <p:spPr>
+          <a:xfrm>
+            <a:off x="9876256" y="2329825"/>
+            <a:ext cx="1783814" cy="741880"/>
+          </a:xfrm>
+          <a:prstGeom prst="bentConnector2">
+            <a:avLst/>
+          </a:prstGeom>
+          <a:ln>
+            <a:solidFill>
+              <a:schemeClr val="accent1">
+                <a:alpha val="70000"/>
+              </a:schemeClr>
+            </a:solidFill>
+            <a:tailEnd type="triangle"/>
+          </a:ln>
+        </p:spPr>
+        <p:style>
+          <a:lnRef idx="2">
+            <a:schemeClr val="accent1"/>
+          </a:lnRef>
+          <a:fillRef idx="0">
+            <a:schemeClr val="accent1"/>
+          </a:fillRef>
+          <a:effectRef idx="1">
+            <a:schemeClr val="accent1"/>
+          </a:effectRef>
+          <a:fontRef idx="minor">
+            <a:schemeClr val="tx1"/>
+          </a:fontRef>
+        </p:style>
+      </p:cxnSp>
+      <p:sp>
+        <p:nvSpPr>
+          <p:cNvPr id="38" name="TextBox 37"/>
+          <p:cNvSpPr txBox="1"/>
+          <p:nvPr/>
+        </p:nvSpPr>
+        <p:spPr>
+          <a:xfrm>
+            <a:off x="9812460" y="2060473"/>
+            <a:ext cx="1715807" cy="276999"/>
+          </a:xfrm>
+          <a:prstGeom prst="rect">
+            <a:avLst/>
+          </a:prstGeom>
+          <a:noFill/>
+        </p:spPr>
+        <p:txBody>
+          <a:bodyPr wrap="square" rtlCol="0">
+            <a:spAutoFit/>
+          </a:bodyPr>
+          <a:lstStyle/>
+          <a:p>
+            <a:r>
+              <a:rPr lang="en-US" sz="1200" dirty="0">
+                <a:solidFill>
+                  <a:schemeClr val="bg1">
+                    <a:lumMod val="50000"/>
+                  </a:schemeClr>
+                </a:solidFill>
+              </a:rPr>
+              <a:t>2. Record Traffic</a:t>
+            </a:r>
+          </a:p>
+        </p:txBody>
+      </p:sp>
+    </p:spTree>
+  </p:cSld>
+  <p:clrMapOvr>
+    <a:masterClrMapping/>
+  </p:clrMapOvr>
+</p:sld>
+</file>
+
+<file path=ppt/slides/slide22.xml><?xml version="1.0" encoding="utf-8"?>
+<p:sld xmlns:a="http://schemas.openxmlformats.org/drawingml/2006/main" xmlns:p="http://schemas.openxmlformats.org/presentationml/2006/main" xmlns:r="http://schemas.openxmlformats.org/officeDocument/2006/relationships">
+  <p:cSld>
+    <p:spTree>
+      <p:nvGrpSpPr>
+        <p:cNvPr id="1" name=""/>
+        <p:cNvGrpSpPr/>
+        <p:nvPr/>
+      </p:nvGrpSpPr>
+      <p:grpSpPr/>
+      <p:cxnSp>
+        <p:nvCxnSpPr>
+          <p:cNvPr id="17" name="Straight Arrow Connector 16"/>
+          <p:cNvCxnSpPr/>
+          <p:nvPr/>
+        </p:nvCxnSpPr>
+        <p:spPr>
+          <a:xfrm flipV="1">
+            <a:off x="6606727" y="3566175"/>
+            <a:ext cx="1983406" cy="4192"/>
+          </a:xfrm>
+          <a:prstGeom prst="straightConnector1">
+            <a:avLst/>
+          </a:prstGeom>
+          <a:ln>
+            <a:tailEnd type="arrow"/>
+          </a:ln>
+        </p:spPr>
+        <p:style>
+          <a:lnRef idx="2">
+            <a:schemeClr val="accent6"/>
+          </a:lnRef>
+          <a:fillRef idx="0">
+            <a:schemeClr val="accent6"/>
+          </a:fillRef>
+          <a:effectRef idx="1">
+            <a:schemeClr val="accent6"/>
+          </a:effectRef>
+          <a:fontRef idx="minor">
+            <a:schemeClr val="tx1"/>
+          </a:fontRef>
+        </p:style>
+      </p:cxnSp>
+      <p:sp>
+        <p:nvSpPr>
+          <p:cNvPr id="18" name="TextBox 17"/>
+          <p:cNvSpPr txBox="1"/>
+          <p:nvPr/>
+        </p:nvSpPr>
+        <p:spPr>
+          <a:xfrm>
+            <a:off x="6521663" y="3291482"/>
+            <a:ext cx="2759008" cy="276999"/>
+          </a:xfrm>
+          <a:prstGeom prst="rect">
+            <a:avLst/>
+          </a:prstGeom>
+          <a:noFill/>
+        </p:spPr>
+        <p:txBody>
+          <a:bodyPr wrap="square" rtlCol="0">
+            <a:spAutoFit/>
+          </a:bodyPr>
+          <a:lstStyle/>
+          <a:p>
+            <a:r>
+              <a:rPr lang="en-US" sz="1200" dirty="0"/>
+              <a:t>3. Retrieve Pair</a:t>
+            </a:r>
+          </a:p>
+        </p:txBody>
+      </p:sp>
+      <p:sp>
+        <p:nvSpPr>
+          <p:cNvPr id="67" name="TextBox 66"/>
+          <p:cNvSpPr txBox="1"/>
+          <p:nvPr/>
+        </p:nvSpPr>
+        <p:spPr>
+          <a:xfrm>
+            <a:off x="6521663" y="4121697"/>
+            <a:ext cx="1553402" cy="276999"/>
+          </a:xfrm>
+          <a:prstGeom prst="rect">
+            <a:avLst/>
+          </a:prstGeom>
+          <a:noFill/>
+        </p:spPr>
+        <p:txBody>
+          <a:bodyPr wrap="square" rtlCol="0">
+            <a:spAutoFit/>
+          </a:bodyPr>
+          <a:lstStyle/>
+          <a:p>
+            <a:r>
+              <a:rPr lang="en-US" sz="1200" dirty="0"/>
+              <a:t>5. Explain Fix</a:t>
+            </a:r>
+          </a:p>
+        </p:txBody>
+      </p:sp>
+      <p:cxnSp>
+        <p:nvCxnSpPr>
+          <p:cNvPr id="88" name="Straight Arrow Connector 87"/>
+          <p:cNvCxnSpPr/>
+          <p:nvPr/>
+        </p:nvCxnSpPr>
+        <p:spPr>
+          <a:xfrm rot="5400000">
+            <a:off x="7662580" y="2914941"/>
+            <a:ext cx="422144" cy="2533849"/>
+          </a:xfrm>
+          <a:prstGeom prst="bentConnector2">
+            <a:avLst/>
+          </a:prstGeom>
+          <a:ln>
+            <a:tailEnd type="triangle"/>
+          </a:ln>
+        </p:spPr>
+        <p:style>
+          <a:lnRef idx="2">
+            <a:schemeClr val="accent6"/>
+          </a:lnRef>
+          <a:fillRef idx="0">
+            <a:schemeClr val="accent6"/>
+          </a:fillRef>
+          <a:effectRef idx="1">
+            <a:schemeClr val="accent6"/>
+          </a:effectRef>
+          <a:fontRef idx="minor">
+            <a:schemeClr val="tx1"/>
+          </a:fontRef>
+        </p:style>
+      </p:cxnSp>
+      <p:sp>
+        <p:nvSpPr>
+          <p:cNvPr id="2" name="Can 1"/>
+          <p:cNvSpPr/>
+          <p:nvPr/>
+        </p:nvSpPr>
+        <p:spPr>
+          <a:xfrm>
+            <a:off x="11173710" y="3122264"/>
+            <a:ext cx="988828" cy="868444"/>
+          </a:xfrm>
+          <a:prstGeom prst="can">
+            <a:avLst/>
+          </a:prstGeom>
+          <a:solidFill>
+            <a:schemeClr val="bg1"/>
+          </a:solidFill>
+          <a:ln w="19050" cmpd="sng">
+            <a:solidFill>
+              <a:schemeClr val="tx1"/>
+            </a:solidFill>
+          </a:ln>
+        </p:spPr>
+        <p:style>
+          <a:lnRef idx="1">
+            <a:schemeClr val="accent6"/>
+          </a:lnRef>
+          <a:fillRef idx="3">
+            <a:schemeClr val="accent6"/>
+          </a:fillRef>
+          <a:effectRef idx="2">
+            <a:schemeClr val="accent6"/>
+          </a:effectRef>
+          <a:fontRef idx="minor">
+            <a:schemeClr val="lt1"/>
+          </a:fontRef>
+        </p:style>
+        <p:txBody>
+          <a:bodyPr lIns="91436" tIns="45718" rIns="91436" bIns="45718" rtlCol="0" anchor="ctr" anchorCtr="0"/>
+          <a:lstStyle/>
+          <a:p>
+            <a:pPr algn="ctr"/>
+            <a:r>
+              <a:rPr lang="en-US" sz="900" dirty="0">
+                <a:solidFill>
+                  <a:schemeClr val="tx1"/>
+                </a:solidFill>
+                <a:latin typeface="Helvetica"/>
+                <a:cs typeface="Helvetica"/>
+              </a:rPr>
+              <a:t>Recorded</a:t>
+            </a:r>
+          </a:p>
+          <a:p>
+            <a:pPr algn="ctr"/>
+            <a:r>
+              <a:rPr lang="en-US" sz="900" dirty="0">
+                <a:solidFill>
+                  <a:schemeClr val="tx1"/>
+                </a:solidFill>
+                <a:latin typeface="Helvetica"/>
+                <a:cs typeface="Helvetica"/>
+              </a:rPr>
+              <a:t>Traffic</a:t>
+            </a:r>
+          </a:p>
+        </p:txBody>
+      </p:sp>
+      <p:sp>
+        <p:nvSpPr>
+          <p:cNvPr id="21" name="Rectangle 20"/>
+          <p:cNvSpPr/>
+          <p:nvPr/>
+        </p:nvSpPr>
+        <p:spPr>
+          <a:xfrm>
+            <a:off x="8664564" y="3242893"/>
+            <a:ext cx="940561" cy="664100"/>
+          </a:xfrm>
+          <a:prstGeom prst="rect">
+            <a:avLst/>
+          </a:prstGeom>
+          <a:solidFill>
+            <a:schemeClr val="bg1"/>
+          </a:solidFill>
+          <a:ln w="19050" cmpd="sng">
+            <a:solidFill>
+              <a:schemeClr val="tx1"/>
+            </a:solidFill>
+          </a:ln>
+        </p:spPr>
+        <p:style>
+          <a:lnRef idx="1">
+            <a:schemeClr val="accent6"/>
+          </a:lnRef>
+          <a:fillRef idx="3">
+            <a:schemeClr val="accent6"/>
+          </a:fillRef>
+          <a:effectRef idx="2">
+            <a:schemeClr val="accent6"/>
+          </a:effectRef>
+          <a:fontRef idx="minor">
+            <a:schemeClr val="lt1"/>
+          </a:fontRef>
+        </p:style>
+        <p:txBody>
+          <a:bodyPr lIns="91436" tIns="45718" rIns="91436" bIns="45718" rtlCol="0" anchor="ctr" anchorCtr="0"/>
+          <a:lstStyle/>
+          <a:p>
+            <a:pPr algn="ctr"/>
+            <a:r>
+              <a:rPr lang="en-US" sz="900" dirty="0">
+                <a:solidFill>
+                  <a:schemeClr val="tx1"/>
+                </a:solidFill>
+                <a:latin typeface="Helvetica"/>
+                <a:cs typeface="Helvetica"/>
+              </a:rPr>
+              <a:t>AI</a:t>
+            </a:r>
+          </a:p>
+          <a:p>
+            <a:pPr algn="ctr"/>
+            <a:r>
+              <a:rPr lang="en-US" sz="900" dirty="0">
+                <a:solidFill>
+                  <a:schemeClr val="tx1"/>
+                </a:solidFill>
+                <a:latin typeface="Helvetica"/>
+                <a:cs typeface="Helvetica"/>
+              </a:rPr>
+              <a:t>Assistant</a:t>
+            </a:r>
+          </a:p>
+        </p:txBody>
+      </p:sp>
+      <p:cxnSp>
+        <p:nvCxnSpPr>
+          <p:cNvPr id="7" name="Straight Arrow Connector 6"/>
+          <p:cNvCxnSpPr/>
+          <p:nvPr/>
+        </p:nvCxnSpPr>
+        <p:spPr>
+          <a:xfrm>
+            <a:off x="9714192" y="3567122"/>
+            <a:ext cx="1355774" cy="7823"/>
+          </a:xfrm>
+          <a:prstGeom prst="straightConnector1">
+            <a:avLst/>
+          </a:prstGeom>
+          <a:ln>
+            <a:headEnd type="triangle"/>
+            <a:tailEnd type="triangle"/>
+          </a:ln>
+        </p:spPr>
+        <p:style>
+          <a:lnRef idx="2">
+            <a:schemeClr val="accent6"/>
+          </a:lnRef>
+          <a:fillRef idx="0">
+            <a:schemeClr val="accent6"/>
+          </a:fillRef>
+          <a:effectRef idx="1">
+            <a:schemeClr val="accent6"/>
+          </a:effectRef>
+          <a:fontRef idx="minor">
+            <a:schemeClr val="tx1"/>
+          </a:fontRef>
+        </p:style>
+      </p:cxnSp>
+      <p:sp>
+        <p:nvSpPr>
+          <p:cNvPr id="28" name="TextBox 27"/>
+          <p:cNvSpPr txBox="1"/>
+          <p:nvPr/>
+        </p:nvSpPr>
+        <p:spPr>
+          <a:xfrm>
+            <a:off x="9639761" y="3274794"/>
+            <a:ext cx="1553402" cy="276999"/>
+          </a:xfrm>
+          <a:prstGeom prst="rect">
+            <a:avLst/>
+          </a:prstGeom>
+          <a:noFill/>
+        </p:spPr>
+        <p:txBody>
+          <a:bodyPr wrap="square" rtlCol="0">
+            <a:spAutoFit/>
+          </a:bodyPr>
+          <a:lstStyle/>
+          <a:p>
+            <a:r>
+              <a:rPr lang="en-US" sz="1200" dirty="0"/>
+              <a:t>4. Diagnose</a:t>
+            </a:r>
+          </a:p>
+        </p:txBody>
+      </p:sp>
+      <p:sp>
+        <p:nvSpPr>
+          <p:cNvPr id="31" name="Rounded Rectangle 30"/>
+          <p:cNvSpPr/>
+          <p:nvPr/>
+        </p:nvSpPr>
+        <p:spPr>
+          <a:xfrm>
+            <a:off x="8457229" y="1823774"/>
+            <a:ext cx="1355231" cy="1012102"/>
+          </a:xfrm>
+          <a:prstGeom prst="roundRect">
+            <a:avLst/>
+          </a:prstGeom>
+          <a:solidFill>
+            <a:schemeClr val="bg1"/>
+          </a:solidFill>
+          <a:ln w="19050" cmpd="sng">
+            <a:solidFill>
+              <a:schemeClr val="tx1">
+                <a:lumMod val="50000"/>
+                <a:lumOff val="50000"/>
+                <a:alpha val="70000"/>
+              </a:schemeClr>
+            </a:solidFill>
+            <a:prstDash val="dash"/>
+          </a:ln>
+        </p:spPr>
+        <p:style>
+          <a:lnRef idx="1">
+            <a:schemeClr val="accent6"/>
+          </a:lnRef>
+          <a:fillRef idx="3">
+            <a:schemeClr val="accent6"/>
+          </a:fillRef>
+          <a:effectRef idx="2">
+            <a:schemeClr val="accent6"/>
+          </a:effectRef>
+          <a:fontRef idx="minor">
+            <a:schemeClr val="lt1"/>
+          </a:fontRef>
+        </p:style>
+        <p:txBody>
+          <a:bodyPr rtlCol="0" anchor="ctr" anchorCtr="0"/>
+          <a:lstStyle/>
+          <a:p>
+            <a:pPr algn="ctr"/>
+            <a:r>
+              <a:rPr lang="en-US" sz="1200" dirty="0">
+                <a:solidFill>
+                  <a:schemeClr val="bg1">
+                    <a:lumMod val="50000"/>
+                  </a:schemeClr>
+                </a:solidFill>
+                <a:latin typeface="Helvetica"/>
+                <a:cs typeface="Helvetica"/>
+              </a:rPr>
+              <a:t>Proxy</a:t>
+            </a:r>
+          </a:p>
+        </p:txBody>
+      </p:sp>
+      <p:cxnSp>
+        <p:nvCxnSpPr>
+          <p:cNvPr id="32" name="Straight Arrow Connector 31"/>
+          <p:cNvCxnSpPr/>
+          <p:nvPr/>
+        </p:nvCxnSpPr>
+        <p:spPr>
+          <a:xfrm flipV="1">
+            <a:off x="6606729" y="2326837"/>
+            <a:ext cx="1764891" cy="1888"/>
+          </a:xfrm>
+          <a:prstGeom prst="straightConnector1">
+            <a:avLst/>
+          </a:prstGeom>
+          <a:ln>
+            <a:solidFill>
+              <a:schemeClr val="accent6">
+                <a:alpha val="70000"/>
+              </a:schemeClr>
+            </a:solidFill>
+            <a:tailEnd type="arrow"/>
+          </a:ln>
+        </p:spPr>
+        <p:style>
+          <a:lnRef idx="2">
+            <a:schemeClr val="accent6"/>
+          </a:lnRef>
+          <a:fillRef idx="0">
+            <a:schemeClr val="accent6"/>
+          </a:fillRef>
+          <a:effectRef idx="1">
+            <a:schemeClr val="accent6"/>
+          </a:effectRef>
+          <a:fontRef idx="minor">
+            <a:schemeClr val="tx1"/>
+          </a:fontRef>
+        </p:style>
+      </p:cxnSp>
+      <p:sp>
+        <p:nvSpPr>
+          <p:cNvPr id="33" name="TextBox 32"/>
+          <p:cNvSpPr txBox="1"/>
+          <p:nvPr/>
+        </p:nvSpPr>
+        <p:spPr>
+          <a:xfrm>
+            <a:off x="6521665" y="2049840"/>
+            <a:ext cx="1715807" cy="276999"/>
+          </a:xfrm>
+          <a:prstGeom prst="rect">
+            <a:avLst/>
+          </a:prstGeom>
+          <a:noFill/>
+        </p:spPr>
+        <p:txBody>
+          <a:bodyPr wrap="square" rtlCol="0">
+            <a:spAutoFit/>
+          </a:bodyPr>
+          <a:lstStyle/>
+          <a:p>
+            <a:r>
+              <a:rPr lang="en-US" sz="1200" dirty="0">
+                <a:solidFill>
+                  <a:schemeClr val="bg1">
+                    <a:lumMod val="50000"/>
+                  </a:schemeClr>
+                </a:solidFill>
+              </a:rPr>
+              <a:t>1. Proxy Request</a:t>
+            </a:r>
+          </a:p>
+        </p:txBody>
+      </p:sp>
+      <p:cxnSp>
+        <p:nvCxnSpPr>
+          <p:cNvPr id="22" name="Elbow Connector 21"/>
+          <p:cNvCxnSpPr/>
+          <p:nvPr/>
+        </p:nvCxnSpPr>
+        <p:spPr>
+          <a:xfrm>
+            <a:off x="9876256" y="2329825"/>
+            <a:ext cx="1783814" cy="741880"/>
+          </a:xfrm>
+          <a:prstGeom prst="bentConnector2">
+            <a:avLst/>
+          </a:prstGeom>
+          <a:ln>
+            <a:solidFill>
+              <a:schemeClr val="accent6">
+                <a:alpha val="70000"/>
+              </a:schemeClr>
+            </a:solidFill>
+            <a:tailEnd type="triangle"/>
+          </a:ln>
+        </p:spPr>
+        <p:style>
+          <a:lnRef idx="2">
+            <a:schemeClr val="accent6"/>
+          </a:lnRef>
+          <a:fillRef idx="0">
+            <a:schemeClr val="accent6"/>
+          </a:fillRef>
+          <a:effectRef idx="1">
+            <a:schemeClr val="accent6"/>
+          </a:effectRef>
+          <a:fontRef idx="minor">
+            <a:schemeClr val="tx1"/>
+          </a:fontRef>
+        </p:style>
+      </p:cxnSp>
+      <p:sp>
+        <p:nvSpPr>
+          <p:cNvPr id="38" name="TextBox 37"/>
+          <p:cNvSpPr txBox="1"/>
+          <p:nvPr/>
+        </p:nvSpPr>
+        <p:spPr>
+          <a:xfrm>
+            <a:off x="9812460" y="2060473"/>
+            <a:ext cx="1715807" cy="276999"/>
+          </a:xfrm>
+          <a:prstGeom prst="rect">
+            <a:avLst/>
+          </a:prstGeom>
+          <a:noFill/>
+        </p:spPr>
+        <p:txBody>
+          <a:bodyPr wrap="square" rtlCol="0">
+            <a:spAutoFit/>
+          </a:bodyPr>
+          <a:lstStyle/>
+          <a:p>
+            <a:r>
+              <a:rPr lang="en-US" sz="1200" dirty="0">
+                <a:solidFill>
+                  <a:schemeClr val="bg1">
+                    <a:lumMod val="50000"/>
+                  </a:schemeClr>
+                </a:solidFill>
+              </a:rPr>
+              <a:t>2. Record Exchange</a:t>
+            </a:r>
+          </a:p>
+        </p:txBody>
+      </p:sp>
+    </p:spTree>
+  </p:cSld>
+  <p:clrMapOvr>
+    <a:masterClrMapping/>
+  </p:clrMapOvr>
+</p:sld>
+</file>
+
+<file path=ppt/slides/slide23.xml><?xml version="1.0" encoding="utf-8"?>
+<p:sld xmlns:a="http://schemas.openxmlformats.org/drawingml/2006/main" xmlns:p="http://schemas.openxmlformats.org/presentationml/2006/main" xmlns:r="http://schemas.openxmlformats.org/officeDocument/2006/relationships">
+  <p:cSld>
+    <p:spTree>
+      <p:nvGrpSpPr>
+        <p:cNvPr id="1" name=""/>
+        <p:cNvGrpSpPr/>
+        <p:nvPr/>
+      </p:nvGrpSpPr>
+      <p:grpSpPr/>
+      <p:grpSp>
+        <p:nvGrpSpPr>
+          <p:cNvPr id="23" name="Group 22">
+            <a:extLst>
+              <a:ext uri="{FF2B5EF4-FFF2-40B4-BE49-F238E27FC236}">
+                <a16:creationId xmlns:a16="http://schemas.microsoft.com/office/drawing/2014/main" id="{7482BE32-192C-AE03-BDDC-4F9A03F74C5B}"/>
+              </a:ext>
+            </a:extLst>
+          </p:cNvPr>
+          <p:cNvGrpSpPr/>
+          <p:nvPr/>
+        </p:nvGrpSpPr>
+        <p:grpSpPr>
+          <a:xfrm>
+            <a:off x="7973480" y="2948459"/>
+            <a:ext cx="3997396" cy="2867691"/>
+            <a:chOff x="1903674" y="2827807"/>
+            <a:chExt cx="3866269" cy="2867691"/>
+          </a:xfrm>
+        </p:grpSpPr>
+        <p:sp>
+          <p:nvSpPr>
+            <p:cNvPr id="24" name="Rounded Rectangle 23">
+              <a:extLst>
+                <a:ext uri="{FF2B5EF4-FFF2-40B4-BE49-F238E27FC236}">
+                  <a16:creationId xmlns:a16="http://schemas.microsoft.com/office/drawing/2014/main" id="{EFE936CC-F2BF-0F57-C2BD-7202B499F983}"/>
+                </a:ext>
+              </a:extLst>
+            </p:cNvPr>
+            <p:cNvSpPr/>
+            <p:nvPr/>
+          </p:nvSpPr>
+          <p:spPr>
+            <a:xfrm>
+              <a:off x="2208474" y="3132607"/>
+              <a:ext cx="3561469" cy="2562891"/>
+            </a:xfrm>
+            <a:prstGeom prst="roundRect">
+              <a:avLst/>
+            </a:prstGeom>
+            <a:solidFill>
+              <a:schemeClr val="bg1"/>
+            </a:solidFill>
+            <a:ln w="19050" cmpd="sng">
+              <a:solidFill>
+                <a:schemeClr val="tx1"/>
+              </a:solidFill>
+              <a:prstDash val="dash"/>
+            </a:ln>
+          </p:spPr>
+          <p:style>
+            <a:lnRef idx="1">
+              <a:schemeClr val="accent4"/>
+            </a:lnRef>
+            <a:fillRef idx="3">
+              <a:schemeClr val="accent4"/>
+            </a:fillRef>
+            <a:effectRef idx="2">
+              <a:schemeClr val="accent4"/>
+            </a:effectRef>
+            <a:fontRef idx="minor">
+              <a:schemeClr val="lt1"/>
+            </a:fontRef>
+          </p:style>
+          <p:txBody>
+            <a:bodyPr rtlCol="0" anchor="b" anchorCtr="0"/>
+            <a:lstStyle/>
+            <a:p>
+              <a:pPr algn="ctr"/>
+              <a:r>
+                <a:rPr lang="en-US" sz="1400" dirty="0">
+                  <a:solidFill>
+                    <a:schemeClr val="tx1"/>
+                  </a:solidFill>
+                  <a:latin typeface="Helvetica"/>
+                  <a:cs typeface="Helvetica"/>
+                </a:rPr>
+                <a:t>Expectation</a:t>
+              </a:r>
+            </a:p>
+          </p:txBody>
+        </p:sp>
+        <p:sp>
+          <p:nvSpPr>
+            <p:cNvPr id="25" name="Rounded Rectangle 24">
+              <a:extLst>
+                <a:ext uri="{FF2B5EF4-FFF2-40B4-BE49-F238E27FC236}">
+                  <a16:creationId xmlns:a16="http://schemas.microsoft.com/office/drawing/2014/main" id="{DA18EAA1-627A-AA87-9C85-26AA3B6FE7FD}"/>
+                </a:ext>
+              </a:extLst>
+            </p:cNvPr>
+            <p:cNvSpPr/>
+            <p:nvPr/>
+          </p:nvSpPr>
+          <p:spPr>
+            <a:xfrm>
+              <a:off x="2056074" y="2980207"/>
+              <a:ext cx="3561469" cy="2562891"/>
+            </a:xfrm>
+            <a:prstGeom prst="roundRect">
+              <a:avLst/>
+            </a:prstGeom>
+            <a:solidFill>
+              <a:schemeClr val="bg1"/>
+            </a:solidFill>
+            <a:ln w="19050" cmpd="sng">
+              <a:solidFill>
+                <a:schemeClr val="tx1"/>
+              </a:solidFill>
+              <a:prstDash val="dash"/>
+            </a:ln>
+          </p:spPr>
+          <p:style>
+            <a:lnRef idx="1">
+              <a:schemeClr val="accent4"/>
+            </a:lnRef>
+            <a:fillRef idx="3">
+              <a:schemeClr val="accent4"/>
+            </a:fillRef>
+            <a:effectRef idx="2">
+              <a:schemeClr val="accent4"/>
+            </a:effectRef>
+            <a:fontRef idx="minor">
+              <a:schemeClr val="lt1"/>
+            </a:fontRef>
+          </p:style>
+          <p:txBody>
+            <a:bodyPr rtlCol="0" anchor="b" anchorCtr="0"/>
+            <a:lstStyle/>
+            <a:p>
+              <a:pPr algn="ctr"/>
+              <a:r>
+                <a:rPr lang="en-US" sz="1400" dirty="0">
+                  <a:solidFill>
+                    <a:schemeClr val="tx1"/>
+                  </a:solidFill>
+                  <a:latin typeface="Helvetica"/>
+                  <a:cs typeface="Helvetica"/>
+                </a:rPr>
+                <a:t>Expectation</a:t>
+              </a:r>
+            </a:p>
+          </p:txBody>
+        </p:sp>
+        <p:sp>
+          <p:nvSpPr>
+            <p:cNvPr id="26" name="Rounded Rectangle 25">
+              <a:extLst>
+                <a:ext uri="{FF2B5EF4-FFF2-40B4-BE49-F238E27FC236}">
+                  <a16:creationId xmlns:a16="http://schemas.microsoft.com/office/drawing/2014/main" id="{E63533AF-F2A4-01A0-E397-7447A7D49748}"/>
+                </a:ext>
+              </a:extLst>
+            </p:cNvPr>
+            <p:cNvSpPr/>
+            <p:nvPr/>
+          </p:nvSpPr>
+          <p:spPr>
+            <a:xfrm>
+              <a:off x="1903674" y="2827807"/>
+              <a:ext cx="3561469" cy="2562891"/>
+            </a:xfrm>
+            <a:prstGeom prst="roundRect">
+              <a:avLst/>
+            </a:prstGeom>
+            <a:solidFill>
+              <a:schemeClr val="bg1"/>
+            </a:solidFill>
+            <a:ln w="19050" cmpd="sng">
+              <a:solidFill>
+                <a:schemeClr val="tx1"/>
+              </a:solidFill>
+              <a:prstDash val="dash"/>
+            </a:ln>
+          </p:spPr>
+          <p:style>
+            <a:lnRef idx="1">
+              <a:schemeClr val="accent4"/>
+            </a:lnRef>
+            <a:fillRef idx="3">
+              <a:schemeClr val="accent4"/>
+            </a:fillRef>
+            <a:effectRef idx="2">
+              <a:schemeClr val="accent4"/>
+            </a:effectRef>
+            <a:fontRef idx="minor">
+              <a:schemeClr val="lt1"/>
+            </a:fontRef>
+          </p:style>
+          <p:txBody>
+            <a:bodyPr rtlCol="0" anchor="b" anchorCtr="0"/>
+            <a:lstStyle/>
+            <a:p>
+              <a:pPr algn="ctr"/>
+              <a:r>
+                <a:rPr lang="en-US" sz="1400" dirty="0">
+                  <a:solidFill>
+                    <a:schemeClr val="tx1"/>
+                  </a:solidFill>
+                  <a:latin typeface="Helvetica"/>
+                  <a:cs typeface="Helvetica"/>
+                </a:rPr>
+                <a:t>Expectation</a:t>
+              </a:r>
+            </a:p>
+          </p:txBody>
+        </p:sp>
+      </p:grpSp>
+      <p:cxnSp>
+        <p:nvCxnSpPr>
+          <p:cNvPr id="17" name="Straight Arrow Connector 16">
+            <a:extLst>
+              <a:ext uri="{FF2B5EF4-FFF2-40B4-BE49-F238E27FC236}">
+                <a16:creationId xmlns:a16="http://schemas.microsoft.com/office/drawing/2014/main" id="{5B090049-CB24-DF51-8285-18C129FB6E40}"/>
+              </a:ext>
+            </a:extLst>
+          </p:cNvPr>
+          <p:cNvCxnSpPr/>
+          <p:nvPr/>
+        </p:nvCxnSpPr>
+        <p:spPr>
+          <a:xfrm flipV="1">
+            <a:off x="6606318" y="3568479"/>
+            <a:ext cx="1260401" cy="1888"/>
+          </a:xfrm>
+          <a:prstGeom prst="straightConnector1">
+            <a:avLst/>
+          </a:prstGeom>
+          <a:ln>
+            <a:tailEnd type="arrow"/>
+          </a:ln>
+        </p:spPr>
+        <p:style>
+          <a:lnRef idx="2">
+            <a:schemeClr val="accent4"/>
+          </a:lnRef>
+          <a:fillRef idx="0">
+            <a:schemeClr val="accent4"/>
+          </a:fillRef>
+          <a:effectRef idx="1">
+            <a:schemeClr val="accent4"/>
+          </a:effectRef>
+          <a:fontRef idx="minor">
+            <a:schemeClr val="tx1"/>
+          </a:fontRef>
+        </p:style>
+      </p:cxnSp>
+      <p:sp>
+        <p:nvSpPr>
+          <p:cNvPr id="18" name="TextBox 17">
+            <a:extLst>
+              <a:ext uri="{FF2B5EF4-FFF2-40B4-BE49-F238E27FC236}">
+                <a16:creationId xmlns:a16="http://schemas.microsoft.com/office/drawing/2014/main" id="{BA8073EF-60BE-531C-439D-844A43B52B23}"/>
+              </a:ext>
+            </a:extLst>
+          </p:cNvPr>
+          <p:cNvSpPr txBox="1"/>
+          <p:nvPr/>
+        </p:nvSpPr>
+        <p:spPr>
+          <a:xfrm>
+            <a:off x="6511199" y="3291482"/>
+            <a:ext cx="1553402" cy="276999"/>
+          </a:xfrm>
+          <a:prstGeom prst="rect">
+            <a:avLst/>
+          </a:prstGeom>
+          <a:noFill/>
+        </p:spPr>
+        <p:txBody>
+          <a:bodyPr wrap="square" rtlCol="0">
+            <a:spAutoFit/>
+          </a:bodyPr>
+          <a:lstStyle/>
+          <a:p>
+            <a:r>
+              <a:rPr lang="en-US" sz="1200" dirty="0"/>
+              <a:t>1. Receive MCP Call</a:t>
+            </a:r>
+          </a:p>
+        </p:txBody>
+      </p:sp>
+      <p:sp>
+        <p:nvSpPr>
+          <p:cNvPr id="67" name="TextBox 66">
+            <a:extLst>
+              <a:ext uri="{FF2B5EF4-FFF2-40B4-BE49-F238E27FC236}">
+                <a16:creationId xmlns:a16="http://schemas.microsoft.com/office/drawing/2014/main" id="{4EACA1DB-92CD-6E01-0CC2-4C78DD115E85}"/>
+              </a:ext>
+            </a:extLst>
+          </p:cNvPr>
+          <p:cNvSpPr txBox="1"/>
+          <p:nvPr/>
+        </p:nvSpPr>
+        <p:spPr>
+          <a:xfrm>
+            <a:off x="6519097" y="4323714"/>
+            <a:ext cx="1553402" cy="276999"/>
+          </a:xfrm>
+          <a:prstGeom prst="rect">
+            <a:avLst/>
+          </a:prstGeom>
+          <a:noFill/>
+        </p:spPr>
+        <p:txBody>
+          <a:bodyPr wrap="square" rtlCol="0">
+            <a:spAutoFit/>
+          </a:bodyPr>
+          <a:lstStyle/>
+          <a:p>
+            <a:r>
+              <a:rPr lang="en-US" sz="1200" dirty="0"/>
+              <a:t>3. Stream SSE Result</a:t>
+            </a:r>
+          </a:p>
+        </p:txBody>
+      </p:sp>
+      <p:sp>
+        <p:nvSpPr>
+          <p:cNvPr id="75" name="Rectangle 74">
+            <a:extLst>
+              <a:ext uri="{FF2B5EF4-FFF2-40B4-BE49-F238E27FC236}">
+                <a16:creationId xmlns:a16="http://schemas.microsoft.com/office/drawing/2014/main" id="{515AA747-2BA0-DC66-94EB-50B7B4220A37}"/>
+              </a:ext>
+            </a:extLst>
+          </p:cNvPr>
+          <p:cNvSpPr/>
+          <p:nvPr/>
+        </p:nvSpPr>
+        <p:spPr>
+          <a:xfrm>
+            <a:off x="9469602" y="3238315"/>
+            <a:ext cx="940561" cy="664100"/>
+          </a:xfrm>
+          <a:prstGeom prst="rect">
+            <a:avLst/>
+          </a:prstGeom>
+          <a:solidFill>
+            <a:schemeClr val="bg1"/>
+          </a:solidFill>
+          <a:ln w="19050" cmpd="sng">
+            <a:solidFill>
+              <a:schemeClr val="tx1"/>
+            </a:solidFill>
+          </a:ln>
+        </p:spPr>
+        <p:style>
+          <a:lnRef idx="1">
+            <a:schemeClr val="accent4"/>
+          </a:lnRef>
+          <a:fillRef idx="3">
+            <a:schemeClr val="accent4"/>
+          </a:fillRef>
+          <a:effectRef idx="2">
+            <a:schemeClr val="accent4"/>
+          </a:effectRef>
+          <a:fontRef idx="minor">
+            <a:schemeClr val="lt1"/>
+          </a:fontRef>
+        </p:style>
+        <p:txBody>
+          <a:bodyPr lIns="91436" tIns="45718" rIns="91436" bIns="45718" rtlCol="0" anchor="ctr" anchorCtr="0"/>
+          <a:lstStyle/>
+          <a:p>
+            <a:pPr algn="ctr"/>
+            <a:r>
+              <a:rPr lang="en-US" sz="900" dirty="0">
+                <a:solidFill>
+                  <a:schemeClr val="tx1"/>
+                </a:solidFill>
+                <a:latin typeface="Helvetica"/>
+                <a:cs typeface="Helvetica"/>
+              </a:rPr>
+              <a:t>Request</a:t>
+            </a:r>
+          </a:p>
+          <a:p>
+            <a:pPr algn="ctr"/>
+            <a:r>
+              <a:rPr lang="en-US" sz="900" dirty="0">
+                <a:solidFill>
+                  <a:schemeClr val="tx1"/>
+                </a:solidFill>
+                <a:latin typeface="Helvetica"/>
+                <a:cs typeface="Helvetica"/>
+              </a:rPr>
+              <a:t>Matcher</a:t>
+            </a:r>
+          </a:p>
+        </p:txBody>
+      </p:sp>
+      <p:cxnSp>
+        <p:nvCxnSpPr>
+          <p:cNvPr id="88" name="Straight Arrow Connector 87">
+            <a:extLst>
+              <a:ext uri="{FF2B5EF4-FFF2-40B4-BE49-F238E27FC236}">
+                <a16:creationId xmlns:a16="http://schemas.microsoft.com/office/drawing/2014/main" id="{90D218C0-BDF0-B03F-0180-05C64C8FE690}"/>
+              </a:ext>
+            </a:extLst>
+          </p:cNvPr>
+          <p:cNvCxnSpPr/>
+          <p:nvPr/>
+        </p:nvCxnSpPr>
+        <p:spPr>
+          <a:xfrm flipH="1" flipV="1">
+            <a:off x="6606316" y="4594953"/>
+            <a:ext cx="3567666" cy="2512"/>
+          </a:xfrm>
+          <a:prstGeom prst="straightConnector1">
+            <a:avLst/>
+          </a:prstGeom>
+          <a:ln>
+            <a:tailEnd type="triangle"/>
+          </a:ln>
+        </p:spPr>
+        <p:style>
+          <a:lnRef idx="2">
+            <a:schemeClr val="accent4"/>
+          </a:lnRef>
+          <a:fillRef idx="0">
+            <a:schemeClr val="accent4"/>
+          </a:fillRef>
+          <a:effectRef idx="1">
+            <a:schemeClr val="accent4"/>
+          </a:effectRef>
+          <a:fontRef idx="minor">
+            <a:schemeClr val="tx1"/>
+          </a:fontRef>
+        </p:style>
+      </p:cxnSp>
+      <p:sp>
+        <p:nvSpPr>
+          <p:cNvPr id="92" name="TextBox 91">
+            <a:extLst>
+              <a:ext uri="{FF2B5EF4-FFF2-40B4-BE49-F238E27FC236}">
+                <a16:creationId xmlns:a16="http://schemas.microsoft.com/office/drawing/2014/main" id="{39046968-6765-AA4A-3A54-91F398DB5F43}"/>
+              </a:ext>
+            </a:extLst>
+          </p:cNvPr>
+          <p:cNvSpPr txBox="1"/>
+          <p:nvPr/>
+        </p:nvSpPr>
+        <p:spPr>
+          <a:xfrm>
+            <a:off x="8083349" y="3293474"/>
+            <a:ext cx="1553402" cy="276999"/>
+          </a:xfrm>
+          <a:prstGeom prst="rect">
+            <a:avLst/>
+          </a:prstGeom>
+          <a:noFill/>
+          <a:effectLst>
+            <a:softEdge rad="12700"/>
+          </a:effectLst>
+        </p:spPr>
+        <p:txBody>
+          <a:bodyPr wrap="square" rtlCol="0">
+            <a:spAutoFit/>
+          </a:bodyPr>
+          <a:lstStyle/>
+          <a:p>
+            <a:r>
+              <a:rPr lang="en-US" sz="1200" dirty="0"/>
+              <a:t>2. Match Request</a:t>
+            </a:r>
+          </a:p>
+        </p:txBody>
+      </p:sp>
+      <p:cxnSp>
+        <p:nvCxnSpPr>
+          <p:cNvPr id="101" name="Straight Arrow Connector 100">
+            <a:extLst>
+              <a:ext uri="{FF2B5EF4-FFF2-40B4-BE49-F238E27FC236}">
+                <a16:creationId xmlns:a16="http://schemas.microsoft.com/office/drawing/2014/main" id="{2057A685-73D1-4430-A677-67195D3E9D2C}"/>
+              </a:ext>
+            </a:extLst>
+          </p:cNvPr>
+          <p:cNvCxnSpPr/>
+          <p:nvPr/>
+        </p:nvCxnSpPr>
+        <p:spPr>
+          <a:xfrm>
+            <a:off x="8178829" y="3570365"/>
+            <a:ext cx="1176446" cy="0"/>
+          </a:xfrm>
+          <a:prstGeom prst="straightConnector1">
+            <a:avLst/>
+          </a:prstGeom>
+          <a:ln>
+            <a:tailEnd type="triangle"/>
+          </a:ln>
+        </p:spPr>
+        <p:style>
+          <a:lnRef idx="2">
+            <a:schemeClr val="accent4"/>
+          </a:lnRef>
+          <a:fillRef idx="0">
+            <a:schemeClr val="accent4"/>
+          </a:fillRef>
+          <a:effectRef idx="1">
+            <a:schemeClr val="accent4"/>
+          </a:effectRef>
+          <a:fontRef idx="minor">
+            <a:schemeClr val="tx1"/>
+          </a:fontRef>
+        </p:style>
+      </p:cxnSp>
+      <p:sp>
+        <p:nvSpPr>
+          <p:cNvPr id="19" name="Rectangle 18">
+            <a:extLst>
+              <a:ext uri="{FF2B5EF4-FFF2-40B4-BE49-F238E27FC236}">
+                <a16:creationId xmlns:a16="http://schemas.microsoft.com/office/drawing/2014/main" id="{A7300852-CE7D-A0F6-074F-0E5B3FFD1351}"/>
+              </a:ext>
+            </a:extLst>
+          </p:cNvPr>
+          <p:cNvSpPr/>
+          <p:nvPr/>
+        </p:nvSpPr>
+        <p:spPr>
+          <a:xfrm>
+            <a:off x="10305924" y="4278588"/>
+            <a:ext cx="940561" cy="664100"/>
+          </a:xfrm>
+          <a:prstGeom prst="rect">
+            <a:avLst/>
+          </a:prstGeom>
+          <a:solidFill>
+            <a:schemeClr val="bg1"/>
+          </a:solidFill>
+          <a:ln w="19050" cmpd="sng">
+            <a:solidFill>
+              <a:schemeClr val="tx1"/>
+            </a:solidFill>
+          </a:ln>
+        </p:spPr>
+        <p:style>
+          <a:lnRef idx="1">
+            <a:schemeClr val="accent4"/>
+          </a:lnRef>
+          <a:fillRef idx="3">
+            <a:schemeClr val="accent4"/>
+          </a:fillRef>
+          <a:effectRef idx="2">
+            <a:schemeClr val="accent4"/>
+          </a:effectRef>
+          <a:fontRef idx="minor">
+            <a:schemeClr val="lt1"/>
+          </a:fontRef>
+        </p:style>
+        <p:txBody>
+          <a:bodyPr lIns="91436" tIns="45718" rIns="91436" bIns="45718" rtlCol="0" anchor="ctr" anchorCtr="0"/>
+          <a:lstStyle/>
+          <a:p>
+            <a:pPr algn="ctr"/>
+            <a:r>
+              <a:rPr lang="en-US" sz="900" dirty="0">
+                <a:solidFill>
+                  <a:schemeClr val="tx1"/>
+                </a:solidFill>
+                <a:latin typeface="Helvetica"/>
+                <a:cs typeface="Helvetica"/>
+              </a:rPr>
+              <a:t>MCP / A2A</a:t>
+            </a:r>
+          </a:p>
+          <a:p>
+            <a:pPr algn="ctr"/>
+            <a:r>
+              <a:rPr lang="en-US" sz="900" dirty="0">
+                <a:solidFill>
+                  <a:schemeClr val="tx1"/>
+                </a:solidFill>
+                <a:latin typeface="Helvetica"/>
+                <a:cs typeface="Helvetica"/>
+              </a:rPr>
+              <a:t>Response</a:t>
+            </a:r>
+          </a:p>
+        </p:txBody>
+      </p:sp>
+      <p:cxnSp>
+        <p:nvCxnSpPr>
+          <p:cNvPr id="20" name="Elbow Connector 19">
+            <a:extLst>
+              <a:ext uri="{FF2B5EF4-FFF2-40B4-BE49-F238E27FC236}">
+                <a16:creationId xmlns:a16="http://schemas.microsoft.com/office/drawing/2014/main" id="{C0E91DF8-62FB-557F-A913-00C1C2B9352B}"/>
+              </a:ext>
+            </a:extLst>
+          </p:cNvPr>
+          <p:cNvCxnSpPr/>
+          <p:nvPr/>
+        </p:nvCxnSpPr>
+        <p:spPr>
+          <a:xfrm>
+            <a:off x="10410161" y="3570367"/>
+            <a:ext cx="366042" cy="708223"/>
+          </a:xfrm>
+          <a:prstGeom prst="bentConnector2">
+            <a:avLst/>
+          </a:prstGeom>
+          <a:ln>
+            <a:tailEnd type="triangle"/>
+          </a:ln>
+        </p:spPr>
+        <p:style>
+          <a:lnRef idx="2">
+            <a:schemeClr val="accent4"/>
+          </a:lnRef>
+          <a:fillRef idx="0">
+            <a:schemeClr val="accent4"/>
+          </a:fillRef>
+          <a:effectRef idx="1">
+            <a:schemeClr val="accent4"/>
+          </a:effectRef>
+          <a:fontRef idx="minor">
+            <a:schemeClr val="tx1"/>
+          </a:fontRef>
+        </p:style>
+      </p:cxnSp>
+    </p:spTree>
+  </p:cSld>
+  <p:clrMapOvr>
+    <a:masterClrMapping/>
+  </p:clrMapOvr>
+</p:sld>
+</file>
+
+<file path=ppt/slides/slide24.xml><?xml version="1.0" encoding="utf-8"?>
+<p:sld xmlns:a="http://schemas.openxmlformats.org/drawingml/2006/main" xmlns:p="http://schemas.openxmlformats.org/presentationml/2006/main" xmlns:r="http://schemas.openxmlformats.org/officeDocument/2006/relationships">
+  <p:cSld>
+    <p:spTree>
+      <p:nvGrpSpPr>
+        <p:cNvPr id="1" name=""/>
+        <p:cNvGrpSpPr/>
+        <p:nvPr/>
+      </p:nvGrpSpPr>
+      <p:grpSpPr/>
+      <p:cxnSp>
+        <p:nvCxnSpPr>
+          <p:cNvPr id="2" name="Connector 1"/>
+          <p:cNvCxnSpPr/>
+          <p:nvPr/>
+        </p:nvCxnSpPr>
+        <p:spPr>
+          <a:xfrm>
+            <a:off x="5305667" y="1422648"/>
+            <a:ext cx="5472963" cy="0"/>
+          </a:xfrm>
+          <a:prstGeom prst="line">
+            <a:avLst/>
+          </a:prstGeom>
+          <a:ln w="28575">
+            <a:solidFill>
+              <a:srgbClr val="4F81BD"/>
+            </a:solidFill>
+            <a:tailEnd type="triangle" w="med" len="med"/>
+          </a:ln>
+        </p:spPr>
+        <p:style>
+          <a:lnRef idx="2">
+            <a:schemeClr val="accent1"/>
+          </a:lnRef>
+          <a:fillRef idx="0">
+            <a:schemeClr val="accent1"/>
+          </a:fillRef>
+          <a:effectRef idx="1">
+            <a:schemeClr val="accent1"/>
+          </a:effectRef>
+          <a:fontRef idx="minor">
+            <a:schemeClr val="tx1"/>
+          </a:fontRef>
+        </p:style>
+      </p:cxnSp>
+      <p:cxnSp>
+        <p:nvCxnSpPr>
+          <p:cNvPr id="3" name="Connector 2"/>
+          <p:cNvCxnSpPr/>
+          <p:nvPr/>
+        </p:nvCxnSpPr>
+        <p:spPr>
+          <a:xfrm>
+            <a:off x="5305667" y="3507944"/>
+            <a:ext cx="5472963" cy="0"/>
+          </a:xfrm>
+          <a:prstGeom prst="line">
+            <a:avLst/>
+          </a:prstGeom>
+          <a:ln w="28575">
+            <a:solidFill>
+              <a:srgbClr val="4F81BD"/>
+            </a:solidFill>
+            <a:tailEnd type="triangle" w="med" len="med"/>
+          </a:ln>
+        </p:spPr>
+        <p:style>
+          <a:lnRef idx="2">
+            <a:schemeClr val="accent1"/>
+          </a:lnRef>
+          <a:fillRef idx="0">
+            <a:schemeClr val="accent1"/>
+          </a:fillRef>
+          <a:effectRef idx="1">
+            <a:schemeClr val="accent1"/>
+          </a:effectRef>
+          <a:fontRef idx="minor">
+            <a:schemeClr val="tx1"/>
+          </a:fontRef>
+        </p:style>
+      </p:cxnSp>
+      <p:cxnSp>
+        <p:nvCxnSpPr>
+          <p:cNvPr id="4" name="Connector 3"/>
+          <p:cNvCxnSpPr/>
+          <p:nvPr/>
+        </p:nvCxnSpPr>
+        <p:spPr>
+          <a:xfrm>
+            <a:off x="4758370" y="5676651"/>
+            <a:ext cx="4104723" cy="0"/>
+          </a:xfrm>
+          <a:prstGeom prst="line">
+            <a:avLst/>
+          </a:prstGeom>
+          <a:ln w="28575">
+            <a:solidFill>
+              <a:srgbClr val="4F81BD"/>
+            </a:solidFill>
+            <a:tailEnd type="triangle" w="med" len="med"/>
+          </a:ln>
+        </p:spPr>
+        <p:style>
+          <a:lnRef idx="2">
+            <a:schemeClr val="accent1"/>
+          </a:lnRef>
+          <a:fillRef idx="0">
+            <a:schemeClr val="accent1"/>
+          </a:fillRef>
+          <a:effectRef idx="1">
+            <a:schemeClr val="accent1"/>
+          </a:effectRef>
+          <a:fontRef idx="minor">
+            <a:schemeClr val="tx1"/>
+          </a:fontRef>
+        </p:style>
+      </p:cxnSp>
+      <p:cxnSp>
+        <p:nvCxnSpPr>
+          <p:cNvPr id="5" name="Connector 4"/>
+          <p:cNvCxnSpPr/>
+          <p:nvPr/>
+        </p:nvCxnSpPr>
+        <p:spPr>
+          <a:xfrm>
+            <a:off x="13241464" y="5676651"/>
+            <a:ext cx="3283778" cy="0"/>
+          </a:xfrm>
+          <a:prstGeom prst="line">
+            <a:avLst/>
+          </a:prstGeom>
+          <a:ln w="28575">
+            <a:solidFill>
+              <a:srgbClr val="4F81BD"/>
+            </a:solidFill>
+            <a:tailEnd type="triangle" w="med" len="med"/>
+          </a:ln>
+        </p:spPr>
+        <p:style>
+          <a:lnRef idx="2">
+            <a:schemeClr val="accent1"/>
+          </a:lnRef>
+          <a:fillRef idx="0">
+            <a:schemeClr val="accent1"/>
+          </a:fillRef>
+          <a:effectRef idx="1">
+            <a:schemeClr val="accent1"/>
+          </a:effectRef>
+          <a:fontRef idx="minor">
+            <a:schemeClr val="tx1"/>
+          </a:fontRef>
+        </p:style>
+      </p:cxnSp>
+      <p:sp>
+        <p:nvSpPr>
+          <p:cNvPr id="6" name="Rectangle 5"/>
+          <p:cNvSpPr/>
+          <p:nvPr/>
+        </p:nvSpPr>
+        <p:spPr>
+          <a:xfrm>
+            <a:off x="1200944" y="963882"/>
+            <a:ext cx="4104722" cy="917530"/>
+          </a:xfrm>
+          <a:prstGeom prst="rect">
+            <a:avLst/>
+          </a:prstGeom>
+          <a:solidFill>
+            <a:srgbClr val="FFFFFF"/>
+          </a:solidFill>
+          <a:ln w="19050">
+            <a:solidFill>
+              <a:srgbClr val="404040"/>
+            </a:solidFill>
+          </a:ln>
+          <a:effectLst/>
+        </p:spPr>
+        <p:style>
+          <a:lnRef idx="1">
+            <a:schemeClr val="accent1"/>
+          </a:lnRef>
+          <a:fillRef idx="3">
+            <a:schemeClr val="accent1"/>
+          </a:fillRef>
+          <a:effectRef idx="2">
+            <a:schemeClr val="accent1"/>
+          </a:effectRef>
+          <a:fontRef idx="minor">
+            <a:schemeClr val="lt1"/>
+          </a:fontRef>
+        </p:style>
+        <p:txBody>
+          <a:bodyPr rtlCol="0" anchor="ctr" wrap="square"/>
+          <a:lstStyle/>
+          <a:p>
+            <a:pPr algn="ctr"/>
+            <a:r>
+              <a:rPr sz="1300">
+                <a:solidFill>
+                  <a:srgbClr val="404040"/>
+                </a:solidFill>
+              </a:rPr>
+              <a:t>AI Assistant</a:t>
+            </a:r>
+            <a:br/>
+            <a:r>
+              <a:rPr sz="1300">
+                <a:solidFill>
+                  <a:srgbClr val="404040"/>
+                </a:solidFill>
+              </a:rPr>
+              <a:t>(Claude Code, Cursor)</a:t>
+            </a:r>
+          </a:p>
+        </p:txBody>
+      </p:sp>
+      <p:sp>
+        <p:nvSpPr>
+          <p:cNvPr id="7" name="Rectangle 6"/>
+          <p:cNvSpPr/>
+          <p:nvPr/>
+        </p:nvSpPr>
+        <p:spPr>
+          <a:xfrm>
+            <a:off x="10778630" y="963882"/>
+            <a:ext cx="4378370" cy="917530"/>
+          </a:xfrm>
+          <a:prstGeom prst="rect">
+            <a:avLst/>
+          </a:prstGeom>
+          <a:solidFill>
+            <a:srgbClr val="FFFFFF"/>
+          </a:solidFill>
+          <a:ln w="31750">
+            <a:solidFill>
+              <a:srgbClr val="4F81BD"/>
+            </a:solidFill>
+          </a:ln>
+          <a:effectLst/>
+        </p:spPr>
+        <p:style>
+          <a:lnRef idx="1">
+            <a:schemeClr val="accent1"/>
+          </a:lnRef>
+          <a:fillRef idx="3">
+            <a:schemeClr val="accent1"/>
+          </a:fillRef>
+          <a:effectRef idx="2">
+            <a:schemeClr val="accent1"/>
+          </a:effectRef>
+          <a:fontRef idx="minor">
+            <a:schemeClr val="lt1"/>
+          </a:fontRef>
+        </p:style>
+        <p:txBody>
+          <a:bodyPr rtlCol="0" anchor="ctr" wrap="square"/>
+          <a:lstStyle/>
+          <a:p>
+            <a:pPr algn="ctr"/>
+            <a:r>
+              <a:rPr sz="1300">
+                <a:solidFill>
+                  <a:srgbClr val="404040"/>
+                </a:solidFill>
+              </a:rPr>
+              <a:t>MockServer</a:t>
+            </a:r>
+          </a:p>
+        </p:txBody>
+      </p:sp>
+      <p:sp>
+        <p:nvSpPr>
+          <p:cNvPr id="8" name="Rectangle 7"/>
+          <p:cNvSpPr/>
+          <p:nvPr/>
+        </p:nvSpPr>
+        <p:spPr>
+          <a:xfrm>
+            <a:off x="1200944" y="3049178"/>
+            <a:ext cx="4104722" cy="917530"/>
+          </a:xfrm>
+          <a:prstGeom prst="rect">
+            <a:avLst/>
+          </a:prstGeom>
+          <a:solidFill>
+            <a:srgbClr val="FFFFFF"/>
+          </a:solidFill>
+          <a:ln w="19050">
+            <a:solidFill>
+              <a:srgbClr val="404040"/>
+            </a:solidFill>
+          </a:ln>
+          <a:effectLst/>
+        </p:spPr>
+        <p:style>
+          <a:lnRef idx="1">
+            <a:schemeClr val="accent1"/>
+          </a:lnRef>
+          <a:fillRef idx="3">
+            <a:schemeClr val="accent1"/>
+          </a:fillRef>
+          <a:effectRef idx="2">
+            <a:schemeClr val="accent1"/>
+          </a:effectRef>
+          <a:fontRef idx="minor">
+            <a:schemeClr val="lt1"/>
+          </a:fontRef>
+        </p:style>
+        <p:txBody>
+          <a:bodyPr rtlCol="0" anchor="ctr" wrap="square"/>
+          <a:lstStyle/>
+          <a:p>
+            <a:pPr algn="ctr"/>
+            <a:r>
+              <a:rPr sz="1300">
+                <a:solidFill>
+                  <a:srgbClr val="404040"/>
+                </a:solidFill>
+              </a:rPr>
+              <a:t>Application</a:t>
+            </a:r>
+            <a:br/>
+            <a:r>
+              <a:rPr sz="1300">
+                <a:solidFill>
+                  <a:srgbClr val="404040"/>
+                </a:solidFill>
+              </a:rPr>
+              <a:t>under test</a:t>
+            </a:r>
+          </a:p>
+        </p:txBody>
+      </p:sp>
+      <p:sp>
+        <p:nvSpPr>
+          <p:cNvPr id="9" name="Rectangle 8"/>
+          <p:cNvSpPr/>
+          <p:nvPr/>
+        </p:nvSpPr>
+        <p:spPr>
+          <a:xfrm>
+            <a:off x="10778630" y="3049178"/>
+            <a:ext cx="4925667" cy="917530"/>
+          </a:xfrm>
+          <a:prstGeom prst="rect">
+            <a:avLst/>
+          </a:prstGeom>
+          <a:solidFill>
+            <a:srgbClr val="FFFFFF"/>
+          </a:solidFill>
+          <a:ln w="31750">
+            <a:solidFill>
+              <a:srgbClr val="4F81BD"/>
+            </a:solidFill>
+          </a:ln>
+          <a:effectLst/>
+        </p:spPr>
+        <p:style>
+          <a:lnRef idx="1">
+            <a:schemeClr val="accent1"/>
+          </a:lnRef>
+          <a:fillRef idx="3">
+            <a:schemeClr val="accent1"/>
+          </a:fillRef>
+          <a:effectRef idx="2">
+            <a:schemeClr val="accent1"/>
+          </a:effectRef>
+          <a:fontRef idx="minor">
+            <a:schemeClr val="lt1"/>
+          </a:fontRef>
+        </p:style>
+        <p:txBody>
+          <a:bodyPr rtlCol="0" anchor="ctr" wrap="square"/>
+          <a:lstStyle/>
+          <a:p>
+            <a:pPr algn="ctr"/>
+            <a:r>
+              <a:rPr sz="1300">
+                <a:solidFill>
+                  <a:srgbClr val="404040"/>
+                </a:solidFill>
+              </a:rPr>
+              <a:t>MockServer</a:t>
+            </a:r>
+            <a:br/>
+            <a:r>
+              <a:rPr sz="1300">
+                <a:solidFill>
+                  <a:srgbClr val="404040"/>
+                </a:solidFill>
+              </a:rPr>
+              <a:t>(fake LLM / MCP / A2A)</a:t>
+            </a:r>
+          </a:p>
+        </p:txBody>
+      </p:sp>
+      <p:sp>
+        <p:nvSpPr>
+          <p:cNvPr id="10" name="Rectangle 9"/>
+          <p:cNvSpPr/>
+          <p:nvPr/>
+        </p:nvSpPr>
+        <p:spPr>
+          <a:xfrm>
+            <a:off x="1200944" y="5217886"/>
+            <a:ext cx="3557426" cy="917530"/>
+          </a:xfrm>
+          <a:prstGeom prst="rect">
+            <a:avLst/>
+          </a:prstGeom>
+          <a:solidFill>
+            <a:srgbClr val="FFFFFF"/>
+          </a:solidFill>
+          <a:ln w="19050">
+            <a:solidFill>
+              <a:srgbClr val="404040"/>
+            </a:solidFill>
+          </a:ln>
+          <a:effectLst/>
+        </p:spPr>
+        <p:style>
+          <a:lnRef idx="1">
+            <a:schemeClr val="accent1"/>
+          </a:lnRef>
+          <a:fillRef idx="3">
+            <a:schemeClr val="accent1"/>
+          </a:fillRef>
+          <a:effectRef idx="2">
+            <a:schemeClr val="accent1"/>
+          </a:effectRef>
+          <a:fontRef idx="minor">
+            <a:schemeClr val="lt1"/>
+          </a:fontRef>
+        </p:style>
+        <p:txBody>
+          <a:bodyPr rtlCol="0" anchor="ctr" wrap="square"/>
+          <a:lstStyle/>
+          <a:p>
+            <a:pPr algn="ctr"/>
+            <a:r>
+              <a:rPr sz="1300">
+                <a:solidFill>
+                  <a:srgbClr val="404040"/>
+                </a:solidFill>
+              </a:rPr>
+              <a:t>AI Agent</a:t>
+            </a:r>
+          </a:p>
+        </p:txBody>
+      </p:sp>
+      <p:sp>
+        <p:nvSpPr>
+          <p:cNvPr id="11" name="Rectangle 10"/>
+          <p:cNvSpPr/>
+          <p:nvPr/>
+        </p:nvSpPr>
+        <p:spPr>
+          <a:xfrm>
+            <a:off x="8863093" y="5217886"/>
+            <a:ext cx="4378370" cy="917530"/>
+          </a:xfrm>
+          <a:prstGeom prst="rect">
+            <a:avLst/>
+          </a:prstGeom>
+          <a:solidFill>
+            <a:srgbClr val="FFFFFF"/>
+          </a:solidFill>
+          <a:ln w="31750">
+            <a:solidFill>
+              <a:srgbClr val="4F81BD"/>
+            </a:solidFill>
+          </a:ln>
+          <a:effectLst/>
+        </p:spPr>
+        <p:style>
+          <a:lnRef idx="1">
+            <a:schemeClr val="accent1"/>
+          </a:lnRef>
+          <a:fillRef idx="3">
+            <a:schemeClr val="accent1"/>
+          </a:fillRef>
+          <a:effectRef idx="2">
+            <a:schemeClr val="accent1"/>
+          </a:effectRef>
+          <a:fontRef idx="minor">
+            <a:schemeClr val="lt1"/>
+          </a:fontRef>
+        </p:style>
+        <p:txBody>
+          <a:bodyPr rtlCol="0" anchor="ctr" wrap="square"/>
+          <a:lstStyle/>
+          <a:p>
+            <a:pPr algn="ctr"/>
+            <a:r>
+              <a:rPr sz="1300">
+                <a:solidFill>
+                  <a:srgbClr val="404040"/>
+                </a:solidFill>
+              </a:rPr>
+              <a:t>MockServer</a:t>
+            </a:r>
+            <a:br/>
+            <a:r>
+              <a:rPr sz="1300">
+                <a:solidFill>
+                  <a:srgbClr val="404040"/>
+                </a:solidFill>
+              </a:rPr>
+              <a:t>(transparent proxy)</a:t>
+            </a:r>
+          </a:p>
+        </p:txBody>
+      </p:sp>
+      <p:sp>
+        <p:nvSpPr>
+          <p:cNvPr id="12" name="Rectangle 11"/>
+          <p:cNvSpPr/>
+          <p:nvPr/>
+        </p:nvSpPr>
+        <p:spPr>
+          <a:xfrm>
+            <a:off x="16525242" y="5217886"/>
+            <a:ext cx="3557426" cy="917530"/>
+          </a:xfrm>
+          <a:prstGeom prst="rect">
+            <a:avLst/>
+          </a:prstGeom>
+          <a:solidFill>
+            <a:srgbClr val="FFFFFF"/>
+          </a:solidFill>
+          <a:ln w="19050">
+            <a:solidFill>
+              <a:srgbClr val="404040"/>
+            </a:solidFill>
+          </a:ln>
+          <a:effectLst/>
+        </p:spPr>
+        <p:style>
+          <a:lnRef idx="1">
+            <a:schemeClr val="accent1"/>
+          </a:lnRef>
+          <a:fillRef idx="3">
+            <a:schemeClr val="accent1"/>
+          </a:fillRef>
+          <a:effectRef idx="2">
+            <a:schemeClr val="accent1"/>
+          </a:effectRef>
+          <a:fontRef idx="minor">
+            <a:schemeClr val="lt1"/>
+          </a:fontRef>
+        </p:style>
+        <p:txBody>
+          <a:bodyPr rtlCol="0" anchor="ctr" wrap="square"/>
+          <a:lstStyle/>
+          <a:p>
+            <a:pPr algn="ctr"/>
+            <a:r>
+              <a:rPr sz="1300">
+                <a:solidFill>
+                  <a:srgbClr val="404040"/>
+                </a:solidFill>
+              </a:rPr>
+              <a:t>Real LLM API</a:t>
+            </a:r>
+          </a:p>
+        </p:txBody>
+      </p:sp>
+      <p:sp>
+        <p:nvSpPr>
+          <p:cNvPr id="13" name="TextBox 12"/>
+          <p:cNvSpPr txBox="1"/>
+          <p:nvPr/>
+        </p:nvSpPr>
+        <p:spPr>
+          <a:xfrm>
+            <a:off x="1200944" y="630235"/>
+            <a:ext cx="6000000" cy="380000"/>
+          </a:xfrm>
+          <a:prstGeom prst="rect">
+            <a:avLst/>
+          </a:prstGeom>
+          <a:noFill/>
+        </p:spPr>
+        <p:txBody>
+          <a:bodyPr wrap="none">
+            <a:spAutoFit/>
+          </a:bodyPr>
+          <a:lstStyle/>
+          <a:p>
+            <a:r>
+              <a:rPr sz="1200">
+                <a:solidFill>
+                  <a:srgbClr val="808080"/>
+                </a:solidFill>
+              </a:rPr>
+              <a:t>Mode 1 - AI controls MockServer</a:t>
+            </a:r>
+          </a:p>
+        </p:txBody>
+      </p:sp>
+      <p:sp>
+        <p:nvSpPr>
+          <p:cNvPr id="14" name="TextBox 13"/>
+          <p:cNvSpPr txBox="1"/>
+          <p:nvPr/>
+        </p:nvSpPr>
+        <p:spPr>
+          <a:xfrm>
+            <a:off x="1200944" y="2715531"/>
+            <a:ext cx="6000000" cy="380000"/>
+          </a:xfrm>
+          <a:prstGeom prst="rect">
+            <a:avLst/>
+          </a:prstGeom>
+          <a:noFill/>
+        </p:spPr>
+        <p:txBody>
+          <a:bodyPr wrap="none">
+            <a:spAutoFit/>
+          </a:bodyPr>
+          <a:lstStyle/>
+          <a:p>
+            <a:r>
+              <a:rPr sz="1200">
+                <a:solidFill>
+                  <a:srgbClr val="808080"/>
+                </a:solidFill>
+              </a:rPr>
+              <a:t>Mode 2 - MockServer mocks AI services</a:t>
+            </a:r>
+          </a:p>
+        </p:txBody>
+      </p:sp>
+      <p:sp>
+        <p:nvSpPr>
+          <p:cNvPr id="15" name="TextBox 14"/>
+          <p:cNvSpPr txBox="1"/>
+          <p:nvPr/>
+        </p:nvSpPr>
+        <p:spPr>
+          <a:xfrm>
+            <a:off x="1200944" y="4884239"/>
+            <a:ext cx="6000000" cy="380000"/>
+          </a:xfrm>
+          <a:prstGeom prst="rect">
+            <a:avLst/>
+          </a:prstGeom>
+          <a:noFill/>
+        </p:spPr>
+        <p:txBody>
+          <a:bodyPr wrap="none">
+            <a:spAutoFit/>
+          </a:bodyPr>
+          <a:lstStyle/>
+          <a:p>
+            <a:r>
+              <a:rPr sz="1200">
+                <a:solidFill>
+                  <a:srgbClr val="808080"/>
+                </a:solidFill>
+              </a:rPr>
+              <a:t>Mode 3 - MockServer observes AI traffic</a:t>
+            </a:r>
+          </a:p>
+        </p:txBody>
+      </p:sp>
+    </p:spTree>
+  </p:cSld>
+  <p:clrMapOvr>
+    <a:masterClrMapping/>
+  </p:clrMapOvr>
+</p:sld>
+</file>
+
+<file path=ppt/slides/slide25.xml><?xml version="1.0" encoding="utf-8"?>
+<p:sld xmlns:a="http://schemas.openxmlformats.org/drawingml/2006/main" xmlns:p="http://schemas.openxmlformats.org/presentationml/2006/main" xmlns:r="http://schemas.openxmlformats.org/officeDocument/2006/relationships">
+  <p:cSld>
+    <p:spTree>
+      <p:nvGrpSpPr>
+        <p:cNvPr id="1" name=""/>
+        <p:cNvGrpSpPr/>
+        <p:nvPr/>
+      </p:nvGrpSpPr>
+      <p:grpSpPr/>
+      <p:cxnSp>
+        <p:nvCxnSpPr>
+          <p:cNvPr id="2" name="Connector 1"/>
+          <p:cNvCxnSpPr/>
+          <p:nvPr/>
+        </p:nvCxnSpPr>
+        <p:spPr>
+          <a:xfrm>
+            <a:off x="5579315" y="1422648"/>
+            <a:ext cx="3283778" cy="0"/>
+          </a:xfrm>
+          <a:prstGeom prst="line">
+            <a:avLst/>
+          </a:prstGeom>
+          <a:ln w="28575">
+            <a:solidFill>
+              <a:srgbClr val="4F81BD"/>
+            </a:solidFill>
+            <a:tailEnd type="triangle" w="med" len="med"/>
+          </a:ln>
+        </p:spPr>
+        <p:style>
+          <a:lnRef idx="2">
+            <a:schemeClr val="accent1"/>
+          </a:lnRef>
+          <a:fillRef idx="0">
+            <a:schemeClr val="accent1"/>
+          </a:fillRef>
+          <a:effectRef idx="1">
+            <a:schemeClr val="accent1"/>
+          </a:effectRef>
+          <a:fontRef idx="minor">
+            <a:schemeClr val="tx1"/>
+          </a:fontRef>
+        </p:style>
+      </p:cxnSp>
+      <p:cxnSp>
+        <p:nvCxnSpPr>
+          <p:cNvPr id="3" name="Connector 2"/>
+          <p:cNvCxnSpPr/>
+          <p:nvPr/>
+        </p:nvCxnSpPr>
+        <p:spPr>
+          <a:xfrm>
+            <a:off x="13788760" y="1422648"/>
+            <a:ext cx="2736482" cy="0"/>
+          </a:xfrm>
+          <a:prstGeom prst="line">
+            <a:avLst/>
+          </a:prstGeom>
+          <a:ln w="28575">
+            <a:solidFill>
+              <a:srgbClr val="4F81BD"/>
+            </a:solidFill>
+            <a:tailEnd type="triangle" w="med" len="med"/>
+          </a:ln>
+        </p:spPr>
+        <p:style>
+          <a:lnRef idx="2">
+            <a:schemeClr val="accent1"/>
+          </a:lnRef>
+          <a:fillRef idx="0">
+            <a:schemeClr val="accent1"/>
+          </a:fillRef>
+          <a:effectRef idx="1">
+            <a:schemeClr val="accent1"/>
+          </a:effectRef>
+          <a:fontRef idx="minor">
+            <a:schemeClr val="tx1"/>
+          </a:fontRef>
+        </p:style>
+      </p:cxnSp>
+      <p:cxnSp>
+        <p:nvCxnSpPr>
+          <p:cNvPr id="4" name="Connector 3"/>
+          <p:cNvCxnSpPr/>
+          <p:nvPr/>
+        </p:nvCxnSpPr>
+        <p:spPr>
+          <a:xfrm>
+            <a:off x="5032018" y="3507944"/>
+            <a:ext cx="3010130" cy="0"/>
+          </a:xfrm>
+          <a:prstGeom prst="line">
+            <a:avLst/>
+          </a:prstGeom>
+          <a:ln w="28575">
+            <a:solidFill>
+              <a:srgbClr val="4F81BD"/>
+            </a:solidFill>
+            <a:tailEnd type="triangle" w="med" len="med"/>
+          </a:ln>
+        </p:spPr>
+        <p:style>
+          <a:lnRef idx="2">
+            <a:schemeClr val="accent1"/>
+          </a:lnRef>
+          <a:fillRef idx="0">
+            <a:schemeClr val="accent1"/>
+          </a:fillRef>
+          <a:effectRef idx="1">
+            <a:schemeClr val="accent1"/>
+          </a:effectRef>
+          <a:fontRef idx="minor">
+            <a:schemeClr val="tx1"/>
+          </a:fontRef>
+        </p:style>
+      </p:cxnSp>
+      <p:cxnSp>
+        <p:nvCxnSpPr>
+          <p:cNvPr id="5" name="Connector 4"/>
+          <p:cNvCxnSpPr/>
+          <p:nvPr/>
+        </p:nvCxnSpPr>
+        <p:spPr>
+          <a:xfrm>
+            <a:off x="12967815" y="3507944"/>
+            <a:ext cx="3010130" cy="0"/>
+          </a:xfrm>
+          <a:prstGeom prst="line">
+            <a:avLst/>
+          </a:prstGeom>
+          <a:ln w="28575">
+            <a:solidFill>
+              <a:srgbClr val="4F81BD"/>
+            </a:solidFill>
+            <a:tailEnd type="triangle" w="med" len="med"/>
+          </a:ln>
+        </p:spPr>
+        <p:style>
+          <a:lnRef idx="2">
+            <a:schemeClr val="accent1"/>
+          </a:lnRef>
+          <a:fillRef idx="0">
+            <a:schemeClr val="accent1"/>
+          </a:fillRef>
+          <a:effectRef idx="1">
+            <a:schemeClr val="accent1"/>
+          </a:effectRef>
+          <a:fontRef idx="minor">
+            <a:schemeClr val="tx1"/>
+          </a:fontRef>
+        </p:style>
+      </p:cxnSp>
+      <p:cxnSp>
+        <p:nvCxnSpPr>
+          <p:cNvPr id="6" name="Connector 5"/>
+          <p:cNvCxnSpPr/>
+          <p:nvPr/>
+        </p:nvCxnSpPr>
+        <p:spPr>
+          <a:xfrm>
+            <a:off x="5032018" y="5676651"/>
+            <a:ext cx="3010130" cy="0"/>
+          </a:xfrm>
+          <a:prstGeom prst="line">
+            <a:avLst/>
+          </a:prstGeom>
+          <a:ln w="28575">
+            <a:solidFill>
+              <a:srgbClr val="4F81BD"/>
+            </a:solidFill>
+            <a:tailEnd type="triangle" w="med" len="med"/>
+          </a:ln>
+        </p:spPr>
+        <p:style>
+          <a:lnRef idx="2">
+            <a:schemeClr val="accent1"/>
+          </a:lnRef>
+          <a:fillRef idx="0">
+            <a:schemeClr val="accent1"/>
+          </a:fillRef>
+          <a:effectRef idx="1">
+            <a:schemeClr val="accent1"/>
+          </a:effectRef>
+          <a:fontRef idx="minor">
+            <a:schemeClr val="tx1"/>
+          </a:fontRef>
+        </p:style>
+      </p:cxnSp>
+      <p:cxnSp>
+        <p:nvCxnSpPr>
+          <p:cNvPr id="7" name="Connector 6"/>
+          <p:cNvCxnSpPr/>
+          <p:nvPr/>
+        </p:nvCxnSpPr>
+        <p:spPr>
+          <a:xfrm>
+            <a:off x="12967815" y="5676651"/>
+            <a:ext cx="3010130" cy="0"/>
+          </a:xfrm>
+          <a:prstGeom prst="line">
+            <a:avLst/>
+          </a:prstGeom>
+          <a:ln w="28575">
+            <a:solidFill>
+              <a:srgbClr val="4F81BD"/>
+            </a:solidFill>
+            <a:tailEnd type="triangle" w="med" len="med"/>
+          </a:ln>
+        </p:spPr>
+        <p:style>
+          <a:lnRef idx="2">
+            <a:schemeClr val="accent1"/>
+          </a:lnRef>
+          <a:fillRef idx="0">
+            <a:schemeClr val="accent1"/>
+          </a:fillRef>
+          <a:effectRef idx="1">
+            <a:schemeClr val="accent1"/>
+          </a:effectRef>
+          <a:fontRef idx="minor">
+            <a:schemeClr val="tx1"/>
+          </a:fontRef>
+        </p:style>
+      </p:cxnSp>
+      <p:sp>
+        <p:nvSpPr>
+          <p:cNvPr id="8" name="Rectangle 7"/>
+          <p:cNvSpPr/>
+          <p:nvPr/>
+        </p:nvSpPr>
+        <p:spPr>
+          <a:xfrm>
+            <a:off x="1200944" y="963882"/>
+            <a:ext cx="4378370" cy="917530"/>
+          </a:xfrm>
+          <a:prstGeom prst="rect">
+            <a:avLst/>
+          </a:prstGeom>
+          <a:solidFill>
+            <a:srgbClr val="FFFFFF"/>
+          </a:solidFill>
+          <a:ln w="19050">
+            <a:solidFill>
+              <a:srgbClr val="404040"/>
+            </a:solidFill>
+          </a:ln>
+          <a:effectLst/>
+        </p:spPr>
+        <p:style>
+          <a:lnRef idx="1">
+            <a:schemeClr val="accent1"/>
+          </a:lnRef>
+          <a:fillRef idx="3">
+            <a:schemeClr val="accent1"/>
+          </a:fillRef>
+          <a:effectRef idx="2">
+            <a:schemeClr val="accent1"/>
+          </a:effectRef>
+          <a:fontRef idx="minor">
+            <a:schemeClr val="lt1"/>
+          </a:fontRef>
+        </p:style>
+        <p:txBody>
+          <a:bodyPr rtlCol="0" anchor="ctr" wrap="square"/>
+          <a:lstStyle/>
+          <a:p>
+            <a:pPr algn="ctr"/>
+            <a:r>
+              <a:rPr sz="1300">
+                <a:solidFill>
+                  <a:srgbClr val="404040"/>
+                </a:solidFill>
+              </a:rPr>
+              <a:t>Recorded traffic</a:t>
+            </a:r>
+            <a:br/>
+            <a:r>
+              <a:rPr sz="1300">
+                <a:solidFill>
+                  <a:srgbClr val="404040"/>
+                </a:solidFill>
+              </a:rPr>
+              <a:t>(MockServer log)</a:t>
+            </a:r>
+          </a:p>
+        </p:txBody>
+      </p:sp>
+      <p:sp>
+        <p:nvSpPr>
+          <p:cNvPr id="9" name="Rectangle 8"/>
+          <p:cNvSpPr/>
+          <p:nvPr/>
+        </p:nvSpPr>
+        <p:spPr>
+          <a:xfrm>
+            <a:off x="8863093" y="963882"/>
+            <a:ext cx="4925667" cy="917530"/>
+          </a:xfrm>
+          <a:prstGeom prst="rect">
+            <a:avLst/>
+          </a:prstGeom>
+          <a:solidFill>
+            <a:srgbClr val="FFFFFF"/>
+          </a:solidFill>
+          <a:ln w="31750">
+            <a:solidFill>
+              <a:srgbClr val="4F81BD"/>
+            </a:solidFill>
+          </a:ln>
+          <a:effectLst/>
+        </p:spPr>
+        <p:style>
+          <a:lnRef idx="1">
+            <a:schemeClr val="accent1"/>
+          </a:lnRef>
+          <a:fillRef idx="3">
+            <a:schemeClr val="accent1"/>
+          </a:fillRef>
+          <a:effectRef idx="2">
+            <a:schemeClr val="accent1"/>
+          </a:effectRef>
+          <a:fontRef idx="minor">
+            <a:schemeClr val="lt1"/>
+          </a:fontRef>
+        </p:style>
+        <p:txBody>
+          <a:bodyPr rtlCol="0" anchor="ctr" wrap="square"/>
+          <a:lstStyle/>
+          <a:p>
+            <a:pPr algn="ctr"/>
+            <a:r>
+              <a:rPr sz="1300">
+                <a:solidFill>
+                  <a:srgbClr val="404040"/>
+                </a:solidFill>
+              </a:rPr>
+              <a:t>Verify vs OpenAPI</a:t>
+            </a:r>
+          </a:p>
+        </p:txBody>
+      </p:sp>
+      <p:sp>
+        <p:nvSpPr>
+          <p:cNvPr id="10" name="Rectangle 9"/>
+          <p:cNvSpPr/>
+          <p:nvPr/>
+        </p:nvSpPr>
+        <p:spPr>
+          <a:xfrm>
+            <a:off x="16525242" y="963882"/>
+            <a:ext cx="3831074" cy="917530"/>
+          </a:xfrm>
+          <a:prstGeom prst="rect">
+            <a:avLst/>
+          </a:prstGeom>
+          <a:solidFill>
+            <a:srgbClr val="FFFFFF"/>
+          </a:solidFill>
+          <a:ln w="19050">
+            <a:solidFill>
+              <a:srgbClr val="404040"/>
+            </a:solidFill>
+          </a:ln>
+          <a:effectLst/>
+        </p:spPr>
+        <p:style>
+          <a:lnRef idx="1">
+            <a:schemeClr val="accent1"/>
+          </a:lnRef>
+          <a:fillRef idx="3">
+            <a:schemeClr val="accent1"/>
+          </a:fillRef>
+          <a:effectRef idx="2">
+            <a:schemeClr val="accent1"/>
+          </a:effectRef>
+          <a:fontRef idx="minor">
+            <a:schemeClr val="lt1"/>
+          </a:fontRef>
+        </p:style>
+        <p:txBody>
+          <a:bodyPr rtlCol="0" anchor="ctr" wrap="square"/>
+          <a:lstStyle/>
+          <a:p>
+            <a:pPr algn="ctr"/>
+            <a:r>
+              <a:rPr sz="1300">
+                <a:solidFill>
+                  <a:srgbClr val="404040"/>
+                </a:solidFill>
+              </a:rPr>
+              <a:t>Conformance</a:t>
+            </a:r>
+            <a:br/>
+            <a:r>
+              <a:rPr sz="1300">
+                <a:solidFill>
+                  <a:srgbClr val="404040"/>
+                </a:solidFill>
+              </a:rPr>
+              <a:t>report</a:t>
+            </a:r>
+          </a:p>
+        </p:txBody>
+      </p:sp>
+      <p:sp>
+        <p:nvSpPr>
+          <p:cNvPr id="11" name="Rectangle 10"/>
+          <p:cNvSpPr/>
+          <p:nvPr/>
+        </p:nvSpPr>
+        <p:spPr>
+          <a:xfrm>
+            <a:off x="1200944" y="3049178"/>
+            <a:ext cx="3831074" cy="917530"/>
+          </a:xfrm>
+          <a:prstGeom prst="rect">
+            <a:avLst/>
+          </a:prstGeom>
+          <a:solidFill>
+            <a:srgbClr val="FFFFFF"/>
+          </a:solidFill>
+          <a:ln w="19050">
+            <a:solidFill>
+              <a:srgbClr val="404040"/>
+            </a:solidFill>
+          </a:ln>
+          <a:effectLst/>
+        </p:spPr>
+        <p:style>
+          <a:lnRef idx="1">
+            <a:schemeClr val="accent1"/>
+          </a:lnRef>
+          <a:fillRef idx="3">
+            <a:schemeClr val="accent1"/>
+          </a:fillRef>
+          <a:effectRef idx="2">
+            <a:schemeClr val="accent1"/>
+          </a:effectRef>
+          <a:fontRef idx="minor">
+            <a:schemeClr val="lt1"/>
+          </a:fontRef>
+        </p:style>
+        <p:txBody>
+          <a:bodyPr rtlCol="0" anchor="ctr" wrap="square"/>
+          <a:lstStyle/>
+          <a:p>
+            <a:pPr algn="ctr"/>
+            <a:r>
+              <a:rPr sz="1300">
+                <a:solidFill>
+                  <a:srgbClr val="404040"/>
+                </a:solidFill>
+              </a:rPr>
+              <a:t>OpenAPI spec</a:t>
+            </a:r>
+          </a:p>
+        </p:txBody>
+      </p:sp>
+      <p:sp>
+        <p:nvSpPr>
+          <p:cNvPr id="12" name="Rectangle 11"/>
+          <p:cNvSpPr/>
+          <p:nvPr/>
+        </p:nvSpPr>
+        <p:spPr>
+          <a:xfrm>
+            <a:off x="8042148" y="3049178"/>
+            <a:ext cx="4925667" cy="917530"/>
+          </a:xfrm>
+          <a:prstGeom prst="rect">
+            <a:avLst/>
+          </a:prstGeom>
+          <a:solidFill>
+            <a:srgbClr val="FFFFFF"/>
+          </a:solidFill>
+          <a:ln w="31750">
+            <a:solidFill>
+              <a:srgbClr val="4F81BD"/>
+            </a:solidFill>
+          </a:ln>
+          <a:effectLst/>
+        </p:spPr>
+        <p:style>
+          <a:lnRef idx="1">
+            <a:schemeClr val="accent1"/>
+          </a:lnRef>
+          <a:fillRef idx="3">
+            <a:schemeClr val="accent1"/>
+          </a:fillRef>
+          <a:effectRef idx="2">
+            <a:schemeClr val="accent1"/>
+          </a:effectRef>
+          <a:fontRef idx="minor">
+            <a:schemeClr val="lt1"/>
+          </a:fontRef>
+        </p:style>
+        <p:txBody>
+          <a:bodyPr rtlCol="0" anchor="ctr" wrap="square"/>
+          <a:lstStyle/>
+          <a:p>
+            <a:pPr algn="ctr"/>
+            <a:r>
+              <a:rPr sz="1300">
+                <a:solidFill>
+                  <a:srgbClr val="404040"/>
+                </a:solidFill>
+              </a:rPr>
+              <a:t>Run contract test</a:t>
+            </a:r>
+          </a:p>
+        </p:txBody>
+      </p:sp>
+      <p:sp>
+        <p:nvSpPr>
+          <p:cNvPr id="13" name="Rectangle 12"/>
+          <p:cNvSpPr/>
+          <p:nvPr/>
+        </p:nvSpPr>
+        <p:spPr>
+          <a:xfrm>
+            <a:off x="15977945" y="3049178"/>
+            <a:ext cx="4104722" cy="917530"/>
+          </a:xfrm>
+          <a:prstGeom prst="rect">
+            <a:avLst/>
+          </a:prstGeom>
+          <a:solidFill>
+            <a:srgbClr val="FFFFFF"/>
+          </a:solidFill>
+          <a:ln w="19050">
+            <a:solidFill>
+              <a:srgbClr val="404040"/>
+            </a:solidFill>
+          </a:ln>
+          <a:effectLst/>
+        </p:spPr>
+        <p:style>
+          <a:lnRef idx="1">
+            <a:schemeClr val="accent1"/>
+          </a:lnRef>
+          <a:fillRef idx="3">
+            <a:schemeClr val="accent1"/>
+          </a:fillRef>
+          <a:effectRef idx="2">
+            <a:schemeClr val="accent1"/>
+          </a:effectRef>
+          <a:fontRef idx="minor">
+            <a:schemeClr val="lt1"/>
+          </a:fontRef>
+        </p:style>
+        <p:txBody>
+          <a:bodyPr rtlCol="0" anchor="ctr" wrap="square"/>
+          <a:lstStyle/>
+          <a:p>
+            <a:pPr algn="ctr"/>
+            <a:r>
+              <a:rPr sz="1300">
+                <a:solidFill>
+                  <a:srgbClr val="404040"/>
+                </a:solidFill>
+              </a:rPr>
+              <a:t>Live service</a:t>
+            </a:r>
+          </a:p>
+        </p:txBody>
+      </p:sp>
+      <p:sp>
+        <p:nvSpPr>
+          <p:cNvPr id="14" name="Rectangle 13"/>
+          <p:cNvSpPr/>
+          <p:nvPr/>
+        </p:nvSpPr>
+        <p:spPr>
+          <a:xfrm>
+            <a:off x="1200944" y="5217886"/>
+            <a:ext cx="3831074" cy="917530"/>
+          </a:xfrm>
+          <a:prstGeom prst="rect">
+            <a:avLst/>
+          </a:prstGeom>
+          <a:solidFill>
+            <a:srgbClr val="FFFFFF"/>
+          </a:solidFill>
+          <a:ln w="19050">
+            <a:solidFill>
+              <a:srgbClr val="404040"/>
+            </a:solidFill>
+          </a:ln>
+          <a:effectLst/>
+        </p:spPr>
+        <p:style>
+          <a:lnRef idx="1">
+            <a:schemeClr val="accent1"/>
+          </a:lnRef>
+          <a:fillRef idx="3">
+            <a:schemeClr val="accent1"/>
+          </a:fillRef>
+          <a:effectRef idx="2">
+            <a:schemeClr val="accent1"/>
+          </a:effectRef>
+          <a:fontRef idx="minor">
+            <a:schemeClr val="lt1"/>
+          </a:fontRef>
+        </p:style>
+        <p:txBody>
+          <a:bodyPr rtlCol="0" anchor="ctr" wrap="square"/>
+          <a:lstStyle/>
+          <a:p>
+            <a:pPr algn="ctr"/>
+            <a:r>
+              <a:rPr sz="1300">
+                <a:solidFill>
+                  <a:srgbClr val="404040"/>
+                </a:solidFill>
+              </a:rPr>
+              <a:t>OpenAPI spec</a:t>
+            </a:r>
+          </a:p>
+        </p:txBody>
+      </p:sp>
+      <p:sp>
+        <p:nvSpPr>
+          <p:cNvPr id="15" name="Rectangle 14"/>
+          <p:cNvSpPr/>
+          <p:nvPr/>
+        </p:nvSpPr>
+        <p:spPr>
+          <a:xfrm>
+            <a:off x="8042148" y="5217886"/>
+            <a:ext cx="4925667" cy="917530"/>
+          </a:xfrm>
+          <a:prstGeom prst="rect">
+            <a:avLst/>
+          </a:prstGeom>
+          <a:solidFill>
+            <a:srgbClr val="FFFFFF"/>
+          </a:solidFill>
+          <a:ln w="31750">
+            <a:solidFill>
+              <a:srgbClr val="4F81BD"/>
+            </a:solidFill>
+          </a:ln>
+          <a:effectLst/>
+        </p:spPr>
+        <p:style>
+          <a:lnRef idx="1">
+            <a:schemeClr val="accent1"/>
+          </a:lnRef>
+          <a:fillRef idx="3">
+            <a:schemeClr val="accent1"/>
+          </a:fillRef>
+          <a:effectRef idx="2">
+            <a:schemeClr val="accent1"/>
+          </a:effectRef>
+          <a:fontRef idx="minor">
+            <a:schemeClr val="lt1"/>
+          </a:fontRef>
+        </p:style>
+        <p:txBody>
+          <a:bodyPr rtlCol="0" anchor="ctr" wrap="square"/>
+          <a:lstStyle/>
+          <a:p>
+            <a:pPr algn="ctr"/>
+            <a:r>
+              <a:rPr sz="1300">
+                <a:solidFill>
+                  <a:srgbClr val="404040"/>
+                </a:solidFill>
+              </a:rPr>
+              <a:t>Run resiliency test</a:t>
+            </a:r>
+          </a:p>
+        </p:txBody>
+      </p:sp>
+      <p:sp>
+        <p:nvSpPr>
+          <p:cNvPr id="16" name="Rectangle 15"/>
+          <p:cNvSpPr/>
+          <p:nvPr/>
+        </p:nvSpPr>
+        <p:spPr>
+          <a:xfrm>
+            <a:off x="15977945" y="5217886"/>
+            <a:ext cx="4104722" cy="917530"/>
+          </a:xfrm>
+          <a:prstGeom prst="rect">
+            <a:avLst/>
+          </a:prstGeom>
+          <a:solidFill>
+            <a:srgbClr val="FFFFFF"/>
+          </a:solidFill>
+          <a:ln w="19050">
+            <a:solidFill>
+              <a:srgbClr val="404040"/>
+            </a:solidFill>
+          </a:ln>
+          <a:effectLst/>
+        </p:spPr>
+        <p:style>
+          <a:lnRef idx="1">
+            <a:schemeClr val="accent1"/>
+          </a:lnRef>
+          <a:fillRef idx="3">
+            <a:schemeClr val="accent1"/>
+          </a:fillRef>
+          <a:effectRef idx="2">
+            <a:schemeClr val="accent1"/>
+          </a:effectRef>
+          <a:fontRef idx="minor">
+            <a:schemeClr val="lt1"/>
+          </a:fontRef>
+        </p:style>
+        <p:txBody>
+          <a:bodyPr rtlCol="0" anchor="ctr" wrap="square"/>
+          <a:lstStyle/>
+          <a:p>
+            <a:pPr algn="ctr"/>
+            <a:r>
+              <a:rPr sz="1300">
+                <a:solidFill>
+                  <a:srgbClr val="404040"/>
+                </a:solidFill>
+              </a:rPr>
+              <a:t>Live service</a:t>
+            </a:r>
+          </a:p>
+        </p:txBody>
+      </p:sp>
+      <p:sp>
+        <p:nvSpPr>
+          <p:cNvPr id="17" name="TextBox 16"/>
+          <p:cNvSpPr txBox="1"/>
+          <p:nvPr/>
+        </p:nvSpPr>
+        <p:spPr>
+          <a:xfrm>
+            <a:off x="1200944" y="630235"/>
+            <a:ext cx="6000000" cy="380000"/>
+          </a:xfrm>
+          <a:prstGeom prst="rect">
+            <a:avLst/>
+          </a:prstGeom>
+          <a:noFill/>
+        </p:spPr>
+        <p:txBody>
+          <a:bodyPr wrap="none">
+            <a:spAutoFit/>
+          </a:bodyPr>
+          <a:lstStyle/>
+          <a:p>
+            <a:r>
+              <a:rPr sz="1200">
+                <a:solidFill>
+                  <a:srgbClr val="808080"/>
+                </a:solidFill>
+              </a:rPr>
+              <a:t>1 - Passive validation (recorded traffic)</a:t>
+            </a:r>
+          </a:p>
+        </p:txBody>
+      </p:sp>
+      <p:sp>
+        <p:nvSpPr>
+          <p:cNvPr id="18" name="TextBox 17"/>
+          <p:cNvSpPr txBox="1"/>
+          <p:nvPr/>
+        </p:nvSpPr>
+        <p:spPr>
+          <a:xfrm>
+            <a:off x="1200944" y="2715531"/>
+            <a:ext cx="6000000" cy="380000"/>
+          </a:xfrm>
+          <a:prstGeom prst="rect">
+            <a:avLst/>
+          </a:prstGeom>
+          <a:noFill/>
+        </p:spPr>
+        <p:txBody>
+          <a:bodyPr wrap="none">
+            <a:spAutoFit/>
+          </a:bodyPr>
+          <a:lstStyle/>
+          <a:p>
+            <a:r>
+              <a:rPr sz="1200">
+                <a:solidFill>
+                  <a:srgbClr val="808080"/>
+                </a:solidFill>
+              </a:rPr>
+              <a:t>2 - Active contract test (live service)</a:t>
+            </a:r>
+          </a:p>
+        </p:txBody>
+      </p:sp>
+      <p:sp>
+        <p:nvSpPr>
+          <p:cNvPr id="19" name="TextBox 18"/>
+          <p:cNvSpPr txBox="1"/>
+          <p:nvPr/>
+        </p:nvSpPr>
+        <p:spPr>
+          <a:xfrm>
+            <a:off x="1200944" y="4884239"/>
+            <a:ext cx="6000000" cy="380000"/>
+          </a:xfrm>
+          <a:prstGeom prst="rect">
+            <a:avLst/>
+          </a:prstGeom>
+          <a:noFill/>
+        </p:spPr>
+        <p:txBody>
+          <a:bodyPr wrap="none">
+            <a:spAutoFit/>
+          </a:bodyPr>
+          <a:lstStyle/>
+          <a:p>
+            <a:r>
+              <a:rPr sz="1200">
+                <a:solidFill>
+                  <a:srgbClr val="808080"/>
+                </a:solidFill>
+              </a:rPr>
+              <a:t>3 - Resiliency / fuzz test (live service)</a:t>
+            </a:r>
+          </a:p>
+        </p:txBody>
+      </p:sp>
+    </p:spTree>
+  </p:cSld>
+  <p:clrMapOvr>
+    <a:masterClrMapping/>
+  </p:clrMapOvr>
+</p:sld>
+</file>
+
+<file path=ppt/slides/slide26.xml><?xml version="1.0" encoding="utf-8"?>
+<p:sld xmlns:a="http://schemas.openxmlformats.org/drawingml/2006/main" xmlns:p="http://schemas.openxmlformats.org/presentationml/2006/main" xmlns:r="http://schemas.openxmlformats.org/officeDocument/2006/relationships">
+  <p:cSld>
+    <p:spTree>
+      <p:nvGrpSpPr>
+        <p:cNvPr id="1" name=""/>
+        <p:cNvGrpSpPr/>
+        <p:nvPr/>
+      </p:nvGrpSpPr>
+      <p:grpSpPr/>
+      <p:cxnSp>
+        <p:nvCxnSpPr>
+          <p:cNvPr id="2" name="Connector 1"/>
+          <p:cNvCxnSpPr/>
+          <p:nvPr/>
+        </p:nvCxnSpPr>
+        <p:spPr>
+          <a:xfrm>
+            <a:off x="4758370" y="1504714"/>
+            <a:ext cx="3283778" cy="1942689"/>
+          </a:xfrm>
+          <a:prstGeom prst="line">
+            <a:avLst/>
+          </a:prstGeom>
+          <a:ln w="28575">
+            <a:solidFill>
+              <a:srgbClr val="4F81BD"/>
+            </a:solidFill>
+            <a:tailEnd type="triangle" w="med" len="med"/>
+          </a:ln>
+        </p:spPr>
+        <p:style>
+          <a:lnRef idx="2">
+            <a:schemeClr val="accent1"/>
+          </a:lnRef>
+          <a:fillRef idx="0">
+            <a:schemeClr val="accent1"/>
+          </a:fillRef>
+          <a:effectRef idx="1">
+            <a:schemeClr val="accent1"/>
+          </a:effectRef>
+          <a:fontRef idx="minor">
+            <a:schemeClr val="tx1"/>
+          </a:fontRef>
+        </p:style>
+      </p:cxnSp>
+      <p:cxnSp>
+        <p:nvCxnSpPr>
+          <p:cNvPr id="3" name="Connector 2"/>
+          <p:cNvCxnSpPr/>
+          <p:nvPr/>
+        </p:nvCxnSpPr>
+        <p:spPr>
+          <a:xfrm>
+            <a:off x="4758370" y="3447403"/>
+            <a:ext cx="3283778" cy="0"/>
+          </a:xfrm>
+          <a:prstGeom prst="line">
+            <a:avLst/>
+          </a:prstGeom>
+          <a:ln w="28575">
+            <a:solidFill>
+              <a:srgbClr val="4F81BD"/>
+            </a:solidFill>
+            <a:tailEnd type="triangle" w="med" len="med"/>
+          </a:ln>
+        </p:spPr>
+        <p:style>
+          <a:lnRef idx="2">
+            <a:schemeClr val="accent1"/>
+          </a:lnRef>
+          <a:fillRef idx="0">
+            <a:schemeClr val="accent1"/>
+          </a:fillRef>
+          <a:effectRef idx="1">
+            <a:schemeClr val="accent1"/>
+          </a:effectRef>
+          <a:fontRef idx="minor">
+            <a:schemeClr val="tx1"/>
+          </a:fontRef>
+        </p:style>
+      </p:cxnSp>
+      <p:cxnSp>
+        <p:nvCxnSpPr>
+          <p:cNvPr id="4" name="Connector 3"/>
+          <p:cNvCxnSpPr/>
+          <p:nvPr/>
+        </p:nvCxnSpPr>
+        <p:spPr>
+          <a:xfrm flipV="1">
+            <a:off x="4758370" y="3447403"/>
+            <a:ext cx="3283778" cy="1942688"/>
+          </a:xfrm>
+          <a:prstGeom prst="line">
+            <a:avLst/>
+          </a:prstGeom>
+          <a:ln w="28575">
+            <a:solidFill>
+              <a:srgbClr val="4F81BD"/>
+            </a:solidFill>
+            <a:tailEnd type="triangle" w="med" len="med"/>
+          </a:ln>
+        </p:spPr>
+        <p:style>
+          <a:lnRef idx="2">
+            <a:schemeClr val="accent1"/>
+          </a:lnRef>
+          <a:fillRef idx="0">
+            <a:schemeClr val="accent1"/>
+          </a:fillRef>
+          <a:effectRef idx="1">
+            <a:schemeClr val="accent1"/>
+          </a:effectRef>
+          <a:fontRef idx="minor">
+            <a:schemeClr val="tx1"/>
+          </a:fontRef>
+        </p:style>
+      </p:cxnSp>
+      <p:cxnSp>
+        <p:nvCxnSpPr>
+          <p:cNvPr id="5" name="Connector 4"/>
+          <p:cNvCxnSpPr/>
+          <p:nvPr/>
+        </p:nvCxnSpPr>
+        <p:spPr>
+          <a:xfrm>
+            <a:off x="12146871" y="3447403"/>
+            <a:ext cx="3010130" cy="0"/>
+          </a:xfrm>
+          <a:prstGeom prst="line">
+            <a:avLst/>
+          </a:prstGeom>
+          <a:ln w="28575">
+            <a:solidFill>
+              <a:srgbClr val="4F81BD"/>
+            </a:solidFill>
+            <a:tailEnd type="triangle" w="med" len="med"/>
+          </a:ln>
+        </p:spPr>
+        <p:style>
+          <a:lnRef idx="2">
+            <a:schemeClr val="accent1"/>
+          </a:lnRef>
+          <a:fillRef idx="0">
+            <a:schemeClr val="accent1"/>
+          </a:fillRef>
+          <a:effectRef idx="1">
+            <a:schemeClr val="accent1"/>
+          </a:effectRef>
+          <a:fontRef idx="minor">
+            <a:schemeClr val="tx1"/>
+          </a:fontRef>
+        </p:style>
+      </p:cxnSp>
+      <p:sp>
+        <p:nvSpPr>
+          <p:cNvPr id="6" name="Rectangle 5"/>
+          <p:cNvSpPr/>
+          <p:nvPr/>
+        </p:nvSpPr>
+        <p:spPr>
+          <a:xfrm>
+            <a:off x="1200944" y="993480"/>
+            <a:ext cx="3557426" cy="1022467"/>
+          </a:xfrm>
+          <a:prstGeom prst="rect">
+            <a:avLst/>
+          </a:prstGeom>
+          <a:solidFill>
+            <a:srgbClr val="FFFFFF"/>
+          </a:solidFill>
+          <a:ln w="19050">
+            <a:solidFill>
+              <a:srgbClr val="404040"/>
+            </a:solidFill>
+          </a:ln>
+          <a:effectLst/>
+        </p:spPr>
+        <p:style>
+          <a:lnRef idx="1">
+            <a:schemeClr val="accent1"/>
+          </a:lnRef>
+          <a:fillRef idx="3">
+            <a:schemeClr val="accent1"/>
+          </a:fillRef>
+          <a:effectRef idx="2">
+            <a:schemeClr val="accent1"/>
+          </a:effectRef>
+          <a:fontRef idx="minor">
+            <a:schemeClr val="lt1"/>
+          </a:fontRef>
+        </p:style>
+        <p:txBody>
+          <a:bodyPr rtlCol="0" anchor="ctr" wrap="square"/>
+          <a:lstStyle/>
+          <a:p>
+            <a:pPr algn="ctr"/>
+            <a:r>
+              <a:rPr sz="1300">
+                <a:solidFill>
+                  <a:srgbClr val="404040"/>
+                </a:solidFill>
+              </a:rPr>
+              <a:t>Team A CI</a:t>
+            </a:r>
+          </a:p>
+        </p:txBody>
+      </p:sp>
+      <p:sp>
+        <p:nvSpPr>
+          <p:cNvPr id="7" name="Rectangle 6"/>
+          <p:cNvSpPr/>
+          <p:nvPr/>
+        </p:nvSpPr>
+        <p:spPr>
+          <a:xfrm>
+            <a:off x="1200944" y="2936169"/>
+            <a:ext cx="3557426" cy="1022467"/>
+          </a:xfrm>
+          <a:prstGeom prst="rect">
+            <a:avLst/>
+          </a:prstGeom>
+          <a:solidFill>
+            <a:srgbClr val="FFFFFF"/>
+          </a:solidFill>
+          <a:ln w="19050">
+            <a:solidFill>
+              <a:srgbClr val="404040"/>
+            </a:solidFill>
+          </a:ln>
+          <a:effectLst/>
+        </p:spPr>
+        <p:style>
+          <a:lnRef idx="1">
+            <a:schemeClr val="accent1"/>
+          </a:lnRef>
+          <a:fillRef idx="3">
+            <a:schemeClr val="accent1"/>
+          </a:fillRef>
+          <a:effectRef idx="2">
+            <a:schemeClr val="accent1"/>
+          </a:effectRef>
+          <a:fontRef idx="minor">
+            <a:schemeClr val="lt1"/>
+          </a:fontRef>
+        </p:style>
+        <p:txBody>
+          <a:bodyPr rtlCol="0" anchor="ctr" wrap="square"/>
+          <a:lstStyle/>
+          <a:p>
+            <a:pPr algn="ctr"/>
+            <a:r>
+              <a:rPr sz="1300">
+                <a:solidFill>
+                  <a:srgbClr val="404040"/>
+                </a:solidFill>
+              </a:rPr>
+              <a:t>Team B CI</a:t>
+            </a:r>
+          </a:p>
+        </p:txBody>
+      </p:sp>
+      <p:sp>
+        <p:nvSpPr>
+          <p:cNvPr id="8" name="Rectangle 7"/>
+          <p:cNvSpPr/>
+          <p:nvPr/>
+        </p:nvSpPr>
+        <p:spPr>
+          <a:xfrm>
+            <a:off x="1200944" y="4878858"/>
+            <a:ext cx="3557426" cy="1022467"/>
+          </a:xfrm>
+          <a:prstGeom prst="rect">
+            <a:avLst/>
+          </a:prstGeom>
+          <a:solidFill>
+            <a:srgbClr val="FFFFFF"/>
+          </a:solidFill>
+          <a:ln w="19050">
+            <a:solidFill>
+              <a:srgbClr val="404040"/>
+            </a:solidFill>
+          </a:ln>
+          <a:effectLst/>
+        </p:spPr>
+        <p:style>
+          <a:lnRef idx="1">
+            <a:schemeClr val="accent1"/>
+          </a:lnRef>
+          <a:fillRef idx="3">
+            <a:schemeClr val="accent1"/>
+          </a:fillRef>
+          <a:effectRef idx="2">
+            <a:schemeClr val="accent1"/>
+          </a:effectRef>
+          <a:fontRef idx="minor">
+            <a:schemeClr val="lt1"/>
+          </a:fontRef>
+        </p:style>
+        <p:txBody>
+          <a:bodyPr rtlCol="0" anchor="ctr" wrap="square"/>
+          <a:lstStyle/>
+          <a:p>
+            <a:pPr algn="ctr"/>
+            <a:r>
+              <a:rPr sz="1300">
+                <a:solidFill>
+                  <a:srgbClr val="404040"/>
+                </a:solidFill>
+              </a:rPr>
+              <a:t>Team C CI</a:t>
+            </a:r>
+          </a:p>
+        </p:txBody>
+      </p:sp>
+      <p:sp>
+        <p:nvSpPr>
+          <p:cNvPr id="9" name="Rectangle 8"/>
+          <p:cNvSpPr/>
+          <p:nvPr/>
+        </p:nvSpPr>
+        <p:spPr>
+          <a:xfrm>
+            <a:off x="8042148" y="2936169"/>
+            <a:ext cx="4104722" cy="1022467"/>
+          </a:xfrm>
+          <a:prstGeom prst="rect">
+            <a:avLst/>
+          </a:prstGeom>
+          <a:solidFill>
+            <a:srgbClr val="FFFFFF"/>
+          </a:solidFill>
+          <a:ln w="19050">
+            <a:solidFill>
+              <a:srgbClr val="404040"/>
+            </a:solidFill>
+          </a:ln>
+          <a:effectLst/>
+        </p:spPr>
+        <p:style>
+          <a:lnRef idx="1">
+            <a:schemeClr val="accent1"/>
+          </a:lnRef>
+          <a:fillRef idx="3">
+            <a:schemeClr val="accent1"/>
+          </a:fillRef>
+          <a:effectRef idx="2">
+            <a:schemeClr val="accent1"/>
+          </a:effectRef>
+          <a:fontRef idx="minor">
+            <a:schemeClr val="lt1"/>
+          </a:fontRef>
+        </p:style>
+        <p:txBody>
+          <a:bodyPr rtlCol="0" anchor="ctr" wrap="square"/>
+          <a:lstStyle/>
+          <a:p>
+            <a:pPr algn="ctr"/>
+            <a:r>
+              <a:rPr sz="1300">
+                <a:solidFill>
+                  <a:srgbClr val="404040"/>
+                </a:solidFill>
+              </a:rPr>
+              <a:t>Load Balancer</a:t>
+            </a:r>
+            <a:br/>
+            <a:r>
+              <a:rPr sz="1300">
+                <a:solidFill>
+                  <a:srgbClr val="404040"/>
+                </a:solidFill>
+              </a:rPr>
+              <a:t>(optional)</a:t>
+            </a:r>
+          </a:p>
+        </p:txBody>
+      </p:sp>
+      <p:sp>
+        <p:nvSpPr>
+          <p:cNvPr id="10" name="Rectangle 9"/>
+          <p:cNvSpPr/>
+          <p:nvPr/>
+        </p:nvSpPr>
+        <p:spPr>
+          <a:xfrm>
+            <a:off x="15157001" y="2936169"/>
+            <a:ext cx="4925667" cy="1022467"/>
+          </a:xfrm>
+          <a:prstGeom prst="rect">
+            <a:avLst/>
+          </a:prstGeom>
+          <a:solidFill>
+            <a:srgbClr val="FFFFFF"/>
+          </a:solidFill>
+          <a:ln w="31750">
+            <a:solidFill>
+              <a:srgbClr val="4F81BD"/>
+            </a:solidFill>
+          </a:ln>
+          <a:effectLst/>
+        </p:spPr>
+        <p:style>
+          <a:lnRef idx="1">
+            <a:schemeClr val="accent1"/>
+          </a:lnRef>
+          <a:fillRef idx="3">
+            <a:schemeClr val="accent1"/>
+          </a:fillRef>
+          <a:effectRef idx="2">
+            <a:schemeClr val="accent1"/>
+          </a:effectRef>
+          <a:fontRef idx="minor">
+            <a:schemeClr val="lt1"/>
+          </a:fontRef>
+        </p:style>
+        <p:txBody>
+          <a:bodyPr rtlCol="0" anchor="ctr" wrap="square"/>
+          <a:lstStyle/>
+          <a:p>
+            <a:pPr algn="ctr"/>
+            <a:r>
+              <a:rPr sz="1300">
+                <a:solidFill>
+                  <a:srgbClr val="404040"/>
+                </a:solidFill>
+              </a:rPr>
+              <a:t>MockServer</a:t>
+            </a:r>
+            <a:br/>
+            <a:r>
+              <a:rPr sz="1300">
+                <a:solidFill>
+                  <a:srgbClr val="404040"/>
+                </a:solidFill>
+              </a:rPr>
+              <a:t>(single shared node)</a:t>
+            </a:r>
+          </a:p>
+        </p:txBody>
+      </p:sp>
+      <p:sp>
+        <p:nvSpPr>
+          <p:cNvPr id="11" name="TextBox 10"/>
+          <p:cNvSpPr txBox="1"/>
+          <p:nvPr/>
+        </p:nvSpPr>
+        <p:spPr>
+          <a:xfrm>
+            <a:off x="1200944" y="584493"/>
+            <a:ext cx="6000000" cy="380000"/>
+          </a:xfrm>
+          <a:prstGeom prst="rect">
+            <a:avLst/>
+          </a:prstGeom>
+          <a:noFill/>
+        </p:spPr>
+        <p:txBody>
+          <a:bodyPr wrap="none">
+            <a:spAutoFit/>
+          </a:bodyPr>
+          <a:lstStyle/>
+          <a:p>
+            <a:r>
+              <a:rPr sz="1200">
+                <a:solidFill>
+                  <a:srgbClr val="808080"/>
+                </a:solidFill>
+              </a:rPr>
+              <a:t>Single shared instance</a:t>
+            </a:r>
+          </a:p>
+        </p:txBody>
+      </p:sp>
+    </p:spTree>
+  </p:cSld>
+  <p:clrMapOvr>
+    <a:masterClrMapping/>
+  </p:clrMapOvr>
+</p:sld>
+</file>
+
+<file path=ppt/slides/slide27.xml><?xml version="1.0" encoding="utf-8"?>
+<p:sld xmlns:a="http://schemas.openxmlformats.org/drawingml/2006/main" xmlns:p="http://schemas.openxmlformats.org/presentationml/2006/main" xmlns:r="http://schemas.openxmlformats.org/officeDocument/2006/relationships">
+  <p:cSld>
+    <p:spTree>
+      <p:nvGrpSpPr>
+        <p:cNvPr id="1" name=""/>
+        <p:cNvGrpSpPr/>
+        <p:nvPr/>
+      </p:nvGrpSpPr>
+      <p:grpSpPr/>
+      <p:cxnSp>
+        <p:nvCxnSpPr>
+          <p:cNvPr id="2" name="Connector 1"/>
+          <p:cNvCxnSpPr/>
+          <p:nvPr/>
+        </p:nvCxnSpPr>
+        <p:spPr>
+          <a:xfrm>
+            <a:off x="4063725" y="1964825"/>
+            <a:ext cx="2499671" cy="1118700"/>
+          </a:xfrm>
+          <a:prstGeom prst="line">
+            <a:avLst/>
+          </a:prstGeom>
+          <a:ln w="28575">
+            <a:solidFill>
+              <a:srgbClr val="4F81BD"/>
+            </a:solidFill>
+            <a:tailEnd type="triangle" w="med" len="med"/>
+          </a:ln>
+        </p:spPr>
+        <p:style>
+          <a:lnRef idx="2">
+            <a:schemeClr val="accent1"/>
+          </a:lnRef>
+          <a:fillRef idx="0">
+            <a:schemeClr val="accent1"/>
+          </a:fillRef>
+          <a:effectRef idx="1">
+            <a:schemeClr val="accent1"/>
+          </a:effectRef>
+          <a:fontRef idx="minor">
+            <a:schemeClr val="tx1"/>
+          </a:fontRef>
+        </p:style>
+      </p:cxnSp>
+      <p:cxnSp>
+        <p:nvCxnSpPr>
+          <p:cNvPr id="3" name="Connector 2"/>
+          <p:cNvCxnSpPr/>
+          <p:nvPr/>
+        </p:nvCxnSpPr>
+        <p:spPr>
+          <a:xfrm flipV="1">
+            <a:off x="4063725" y="3083525"/>
+            <a:ext cx="2499671" cy="1118700"/>
+          </a:xfrm>
+          <a:prstGeom prst="line">
+            <a:avLst/>
+          </a:prstGeom>
+          <a:ln w="28575">
+            <a:solidFill>
+              <a:srgbClr val="4F81BD"/>
+            </a:solidFill>
+            <a:tailEnd type="triangle" w="med" len="med"/>
+          </a:ln>
+        </p:spPr>
+        <p:style>
+          <a:lnRef idx="2">
+            <a:schemeClr val="accent1"/>
+          </a:lnRef>
+          <a:fillRef idx="0">
+            <a:schemeClr val="accent1"/>
+          </a:fillRef>
+          <a:effectRef idx="1">
+            <a:schemeClr val="accent1"/>
+          </a:effectRef>
+          <a:fontRef idx="minor">
+            <a:schemeClr val="tx1"/>
+          </a:fontRef>
+        </p:style>
+      </p:cxnSp>
+      <p:cxnSp>
+        <p:nvCxnSpPr>
+          <p:cNvPr id="4" name="Connector 3"/>
+          <p:cNvCxnSpPr/>
+          <p:nvPr/>
+        </p:nvCxnSpPr>
+        <p:spPr>
+          <a:xfrm flipV="1">
+            <a:off x="10247121" y="1219025"/>
+            <a:ext cx="3025917" cy="1864500"/>
+          </a:xfrm>
+          <a:prstGeom prst="line">
+            <a:avLst/>
+          </a:prstGeom>
+          <a:ln w="28575">
+            <a:solidFill>
+              <a:srgbClr val="4F81BD"/>
+            </a:solidFill>
+            <a:tailEnd type="triangle" w="med" len="med"/>
+          </a:ln>
+        </p:spPr>
+        <p:style>
+          <a:lnRef idx="2">
+            <a:schemeClr val="accent1"/>
+          </a:lnRef>
+          <a:fillRef idx="0">
+            <a:schemeClr val="accent1"/>
+          </a:fillRef>
+          <a:effectRef idx="1">
+            <a:schemeClr val="accent1"/>
+          </a:effectRef>
+          <a:fontRef idx="minor">
+            <a:schemeClr val="tx1"/>
+          </a:fontRef>
+        </p:style>
+      </p:cxnSp>
+      <p:cxnSp>
+        <p:nvCxnSpPr>
+          <p:cNvPr id="5" name="Connector 4"/>
+          <p:cNvCxnSpPr/>
+          <p:nvPr/>
+        </p:nvCxnSpPr>
+        <p:spPr>
+          <a:xfrm>
+            <a:off x="10247121" y="3083525"/>
+            <a:ext cx="3025917" cy="372900"/>
+          </a:xfrm>
+          <a:prstGeom prst="line">
+            <a:avLst/>
+          </a:prstGeom>
+          <a:ln w="28575">
+            <a:solidFill>
+              <a:srgbClr val="4F81BD"/>
+            </a:solidFill>
+            <a:tailEnd type="triangle" w="med" len="med"/>
+          </a:ln>
+        </p:spPr>
+        <p:style>
+          <a:lnRef idx="2">
+            <a:schemeClr val="accent1"/>
+          </a:lnRef>
+          <a:fillRef idx="0">
+            <a:schemeClr val="accent1"/>
+          </a:fillRef>
+          <a:effectRef idx="1">
+            <a:schemeClr val="accent1"/>
+          </a:effectRef>
+          <a:fontRef idx="minor">
+            <a:schemeClr val="tx1"/>
+          </a:fontRef>
+        </p:style>
+      </p:cxnSp>
+      <p:cxnSp>
+        <p:nvCxnSpPr>
+          <p:cNvPr id="6" name="Connector 5"/>
+          <p:cNvCxnSpPr/>
+          <p:nvPr/>
+        </p:nvCxnSpPr>
+        <p:spPr>
+          <a:xfrm>
+            <a:off x="10247121" y="3083525"/>
+            <a:ext cx="3025917" cy="2610300"/>
+          </a:xfrm>
+          <a:prstGeom prst="line">
+            <a:avLst/>
+          </a:prstGeom>
+          <a:ln w="28575">
+            <a:solidFill>
+              <a:srgbClr val="4F81BD"/>
+            </a:solidFill>
+            <a:tailEnd type="triangle" w="med" len="med"/>
+          </a:ln>
+        </p:spPr>
+        <p:style>
+          <a:lnRef idx="2">
+            <a:schemeClr val="accent1"/>
+          </a:lnRef>
+          <a:fillRef idx="0">
+            <a:schemeClr val="accent1"/>
+          </a:fillRef>
+          <a:effectRef idx="1">
+            <a:schemeClr val="accent1"/>
+          </a:effectRef>
+          <a:fontRef idx="minor">
+            <a:schemeClr val="tx1"/>
+          </a:fontRef>
+        </p:style>
+      </p:cxnSp>
+      <p:sp>
+        <p:nvSpPr>
+          <p:cNvPr id="7" name="Rectangle 6"/>
+          <p:cNvSpPr/>
+          <p:nvPr/>
+        </p:nvSpPr>
+        <p:spPr>
+          <a:xfrm>
+            <a:off x="906246" y="1498700"/>
+            <a:ext cx="3157478" cy="932250"/>
+          </a:xfrm>
+          <a:prstGeom prst="rect">
+            <a:avLst/>
+          </a:prstGeom>
+          <a:solidFill>
+            <a:srgbClr val="FFFFFF"/>
+          </a:solidFill>
+          <a:ln w="19050">
+            <a:solidFill>
+              <a:srgbClr val="404040"/>
+            </a:solidFill>
+          </a:ln>
+          <a:effectLst/>
+        </p:spPr>
+        <p:style>
+          <a:lnRef idx="1">
+            <a:schemeClr val="accent1"/>
+          </a:lnRef>
+          <a:fillRef idx="3">
+            <a:schemeClr val="accent1"/>
+          </a:fillRef>
+          <a:effectRef idx="2">
+            <a:schemeClr val="accent1"/>
+          </a:effectRef>
+          <a:fontRef idx="minor">
+            <a:schemeClr val="lt1"/>
+          </a:fontRef>
+        </p:style>
+        <p:txBody>
+          <a:bodyPr rtlCol="0" anchor="ctr" wrap="square"/>
+          <a:lstStyle/>
+          <a:p>
+            <a:pPr algn="ctr"/>
+            <a:r>
+              <a:rPr sz="1300">
+                <a:solidFill>
+                  <a:srgbClr val="404040"/>
+                </a:solidFill>
+              </a:rPr>
+              <a:t>Team A CI</a:t>
+            </a:r>
+          </a:p>
+        </p:txBody>
+      </p:sp>
+      <p:sp>
+        <p:nvSpPr>
+          <p:cNvPr id="8" name="Rectangle 7"/>
+          <p:cNvSpPr/>
+          <p:nvPr/>
+        </p:nvSpPr>
+        <p:spPr>
+          <a:xfrm>
+            <a:off x="906246" y="3736100"/>
+            <a:ext cx="3157478" cy="932250"/>
+          </a:xfrm>
+          <a:prstGeom prst="rect">
+            <a:avLst/>
+          </a:prstGeom>
+          <a:solidFill>
+            <a:srgbClr val="FFFFFF"/>
+          </a:solidFill>
+          <a:ln w="19050">
+            <a:solidFill>
+              <a:srgbClr val="404040"/>
+            </a:solidFill>
+          </a:ln>
+          <a:effectLst/>
+        </p:spPr>
+        <p:style>
+          <a:lnRef idx="1">
+            <a:schemeClr val="accent1"/>
+          </a:lnRef>
+          <a:fillRef idx="3">
+            <a:schemeClr val="accent1"/>
+          </a:fillRef>
+          <a:effectRef idx="2">
+            <a:schemeClr val="accent1"/>
+          </a:effectRef>
+          <a:fontRef idx="minor">
+            <a:schemeClr val="lt1"/>
+          </a:fontRef>
+        </p:style>
+        <p:txBody>
+          <a:bodyPr rtlCol="0" anchor="ctr" wrap="square"/>
+          <a:lstStyle/>
+          <a:p>
+            <a:pPr algn="ctr"/>
+            <a:r>
+              <a:rPr sz="1300">
+                <a:solidFill>
+                  <a:srgbClr val="404040"/>
+                </a:solidFill>
+              </a:rPr>
+              <a:t>Team B CI</a:t>
+            </a:r>
+          </a:p>
+        </p:txBody>
+      </p:sp>
+      <p:sp>
+        <p:nvSpPr>
+          <p:cNvPr id="9" name="Rectangle 8"/>
+          <p:cNvSpPr/>
+          <p:nvPr/>
+        </p:nvSpPr>
+        <p:spPr>
+          <a:xfrm>
+            <a:off x="6563396" y="2617400"/>
+            <a:ext cx="3683725" cy="932250"/>
+          </a:xfrm>
+          <a:prstGeom prst="rect">
+            <a:avLst/>
+          </a:prstGeom>
+          <a:solidFill>
+            <a:srgbClr val="FFFFFF"/>
+          </a:solidFill>
+          <a:ln w="19050">
+            <a:solidFill>
+              <a:srgbClr val="404040"/>
+            </a:solidFill>
+          </a:ln>
+          <a:effectLst/>
+        </p:spPr>
+        <p:style>
+          <a:lnRef idx="1">
+            <a:schemeClr val="accent1"/>
+          </a:lnRef>
+          <a:fillRef idx="3">
+            <a:schemeClr val="accent1"/>
+          </a:fillRef>
+          <a:effectRef idx="2">
+            <a:schemeClr val="accent1"/>
+          </a:effectRef>
+          <a:fontRef idx="minor">
+            <a:schemeClr val="lt1"/>
+          </a:fontRef>
+        </p:style>
+        <p:txBody>
+          <a:bodyPr rtlCol="0" anchor="ctr" wrap="square"/>
+          <a:lstStyle/>
+          <a:p>
+            <a:pPr algn="ctr"/>
+            <a:r>
+              <a:rPr sz="1300">
+                <a:solidFill>
+                  <a:srgbClr val="404040"/>
+                </a:solidFill>
+              </a:rPr>
+              <a:t>Load Balancer</a:t>
+            </a:r>
+          </a:p>
+        </p:txBody>
+      </p:sp>
+      <p:sp>
+        <p:nvSpPr>
+          <p:cNvPr id="10" name="Rectangle 9"/>
+          <p:cNvSpPr/>
+          <p:nvPr/>
+        </p:nvSpPr>
+        <p:spPr>
+          <a:xfrm>
+            <a:off x="13273038" y="752900"/>
+            <a:ext cx="3946848" cy="932250"/>
+          </a:xfrm>
+          <a:prstGeom prst="rect">
+            <a:avLst/>
+          </a:prstGeom>
+          <a:solidFill>
+            <a:srgbClr val="FFFFFF"/>
+          </a:solidFill>
+          <a:ln w="31750">
+            <a:solidFill>
+              <a:srgbClr val="4F81BD"/>
+            </a:solidFill>
+          </a:ln>
+          <a:effectLst/>
+        </p:spPr>
+        <p:style>
+          <a:lnRef idx="1">
+            <a:schemeClr val="accent1"/>
+          </a:lnRef>
+          <a:fillRef idx="3">
+            <a:schemeClr val="accent1"/>
+          </a:fillRef>
+          <a:effectRef idx="2">
+            <a:schemeClr val="accent1"/>
+          </a:effectRef>
+          <a:fontRef idx="minor">
+            <a:schemeClr val="lt1"/>
+          </a:fontRef>
+        </p:style>
+        <p:txBody>
+          <a:bodyPr rtlCol="0" anchor="ctr" wrap="square"/>
+          <a:lstStyle/>
+          <a:p>
+            <a:pPr algn="ctr"/>
+            <a:r>
+              <a:rPr sz="1300">
+                <a:solidFill>
+                  <a:srgbClr val="404040"/>
+                </a:solidFill>
+              </a:rPr>
+              <a:t>MockServer Node A</a:t>
+            </a:r>
+          </a:p>
+        </p:txBody>
+      </p:sp>
+      <p:sp>
+        <p:nvSpPr>
+          <p:cNvPr id="11" name="Rectangle 10"/>
+          <p:cNvSpPr/>
+          <p:nvPr/>
+        </p:nvSpPr>
+        <p:spPr>
+          <a:xfrm>
+            <a:off x="13273038" y="2990300"/>
+            <a:ext cx="3946848" cy="932250"/>
+          </a:xfrm>
+          <a:prstGeom prst="rect">
+            <a:avLst/>
+          </a:prstGeom>
+          <a:solidFill>
+            <a:srgbClr val="FFFFFF"/>
+          </a:solidFill>
+          <a:ln w="31750">
+            <a:solidFill>
+              <a:srgbClr val="4F81BD"/>
+            </a:solidFill>
+          </a:ln>
+          <a:effectLst/>
+        </p:spPr>
+        <p:style>
+          <a:lnRef idx="1">
+            <a:schemeClr val="accent1"/>
+          </a:lnRef>
+          <a:fillRef idx="3">
+            <a:schemeClr val="accent1"/>
+          </a:fillRef>
+          <a:effectRef idx="2">
+            <a:schemeClr val="accent1"/>
+          </a:effectRef>
+          <a:fontRef idx="minor">
+            <a:schemeClr val="lt1"/>
+          </a:fontRef>
+        </p:style>
+        <p:txBody>
+          <a:bodyPr rtlCol="0" anchor="ctr" wrap="square"/>
+          <a:lstStyle/>
+          <a:p>
+            <a:pPr algn="ctr"/>
+            <a:r>
+              <a:rPr sz="1300">
+                <a:solidFill>
+                  <a:srgbClr val="404040"/>
+                </a:solidFill>
+              </a:rPr>
+              <a:t>MockServer Node B</a:t>
+            </a:r>
+          </a:p>
+        </p:txBody>
+      </p:sp>
+      <p:sp>
+        <p:nvSpPr>
+          <p:cNvPr id="12" name="Rectangle 11"/>
+          <p:cNvSpPr/>
+          <p:nvPr/>
+        </p:nvSpPr>
+        <p:spPr>
+          <a:xfrm>
+            <a:off x="13273038" y="5227700"/>
+            <a:ext cx="3946848" cy="932250"/>
+          </a:xfrm>
+          <a:prstGeom prst="rect">
+            <a:avLst/>
+          </a:prstGeom>
+          <a:solidFill>
+            <a:srgbClr val="FFFFFF"/>
+          </a:solidFill>
+          <a:ln w="31750">
+            <a:solidFill>
+              <a:srgbClr val="4F81BD"/>
+            </a:solidFill>
+          </a:ln>
+          <a:effectLst/>
+        </p:spPr>
+        <p:style>
+          <a:lnRef idx="1">
+            <a:schemeClr val="accent1"/>
+          </a:lnRef>
+          <a:fillRef idx="3">
+            <a:schemeClr val="accent1"/>
+          </a:fillRef>
+          <a:effectRef idx="2">
+            <a:schemeClr val="accent1"/>
+          </a:effectRef>
+          <a:fontRef idx="minor">
+            <a:schemeClr val="lt1"/>
+          </a:fontRef>
+        </p:style>
+        <p:txBody>
+          <a:bodyPr rtlCol="0" anchor="ctr" wrap="square"/>
+          <a:lstStyle/>
+          <a:p>
+            <a:pPr algn="ctr"/>
+            <a:r>
+              <a:rPr sz="1300">
+                <a:solidFill>
+                  <a:srgbClr val="404040"/>
+                </a:solidFill>
+              </a:rPr>
+              <a:t>MockServer Node C</a:t>
+            </a:r>
+          </a:p>
+        </p:txBody>
+      </p:sp>
+      <p:sp>
+        <p:nvSpPr>
+          <p:cNvPr id="13" name="TextBox 12"/>
+          <p:cNvSpPr txBox="1"/>
+          <p:nvPr/>
+        </p:nvSpPr>
+        <p:spPr>
+          <a:xfrm>
+            <a:off x="906246" y="1032575"/>
+            <a:ext cx="6000000" cy="380000"/>
+          </a:xfrm>
+          <a:prstGeom prst="rect">
+            <a:avLst/>
+          </a:prstGeom>
+          <a:noFill/>
+        </p:spPr>
+        <p:txBody>
+          <a:bodyPr wrap="none">
+            <a:spAutoFit/>
+          </a:bodyPr>
+          <a:lstStyle/>
+          <a:p>
+            <a:r>
+              <a:rPr sz="1200">
+                <a:solidFill>
+                  <a:srgbClr val="808080"/>
+                </a:solidFill>
+              </a:rPr>
+              <a:t>Clustered HA - shared state via Infinispan (JGroups REPL_SYNC)</a:t>
+            </a:r>
+          </a:p>
+        </p:txBody>
+      </p:sp>
+    </p:spTree>
+  </p:cSld>
+  <p:clrMapOvr>
+    <a:masterClrMapping/>
+  </p:clrMapOvr>
+</p:sld>
+</file>
+
 <file path=ppt/slides/slide3.xml><?xml version="1.0" encoding="utf-8"?>
 <p:sld xmlns:a="http://schemas.openxmlformats.org/drawingml/2006/main" xmlns:r="http://schemas.openxmlformats.org/officeDocument/2006/relationships" xmlns:p="http://schemas.openxmlformats.org/presentationml/2006/main">
   <p:cSld>
